--- a/examples/01-ai-startup-investor-pitch.pptx
+++ b/examples/01-ai-startup-investor-pitch.pptx
@@ -3448,7 +3448,7 @@
               </a:defRPr>
             </a:pPr>
             <a:r>
-              <a:t>{Attention hook}</a:t>
+              <a:t>What if deploying AI was as easy as git push?</a:t>
             </a:r>
           </a:p>
         </p:txBody>
@@ -3484,7 +3484,7 @@
               </a:defRPr>
             </a:pPr>
             <a:r>
-              <a:t>{Interesting detail}. {Desirable outcome}.</a:t>
+              <a:t>NeuralForge makes production AI deployment instant, reliable, and cost-effective.</a:t>
             </a:r>
           </a:p>
         </p:txBody>
@@ -3601,7 +3601,7 @@
               </a:defRPr>
             </a:pPr>
             <a:r>
-              <a:t>立即{行动}</a:t>
+              <a:t>Start deploying in minutes</a:t>
             </a:r>
           </a:p>
         </p:txBody>
@@ -3637,7 +3637,7 @@
               </a:defRPr>
             </a:pPr>
             <a:r>
-              <a:t>限时{优惠}。</a:t>
+              <a:t>Free tier available. No credit card required.</a:t>
             </a:r>
           </a:p>
         </p:txBody>
@@ -3696,7 +3696,7 @@
               </a:defRPr>
             </a:pPr>
             <a:r>
-              <a:t>立即{行动}</a:t>
+              <a:t>Start deploying in minutes</a:t>
             </a:r>
           </a:p>
         </p:txBody>
@@ -3759,7 +3759,7 @@
               </a:defRPr>
             </a:pPr>
             <a:r>
-              <a:t>你正面临{问题}</a:t>
+              <a:t>The problem is bigger than you think</a:t>
             </a:r>
           </a:p>
         </p:txBody>
@@ -3795,15 +3795,15 @@
               </a:defRPr>
             </a:pPr>
             <a:r>
-              <a:t>• [problem 要点1]</a:t>
+              <a:t>• Training takes weeks for production models</a:t>
             </a:r>
             <a:br/>
             <a:r>
-              <a:t>• [problem 要点2]</a:t>
+              <a:t>• GPU cloud costs are exploding 3x year-over-year</a:t>
             </a:r>
             <a:br/>
             <a:r>
-              <a:t>• [problem 要点3]</a:t>
+              <a:t>• Lab models fail silently in production environments</a:t>
             </a:r>
           </a:p>
         </p:txBody>
@@ -3909,7 +3909,7 @@
               </a:defRPr>
             </a:pPr>
             <a:r>
-              <a:t>{Feature}让你{Advantage}</a:t>
+              <a:t>One-Click Model Deployment</a:t>
             </a:r>
           </a:p>
         </p:txBody>
@@ -3945,15 +3945,15 @@
               </a:defRPr>
             </a:pPr>
             <a:r>
-              <a:t>• [solution 要点1]</a:t>
+              <a:t>• Auto-optimized inference</a:t>
             </a:r>
             <a:br/>
             <a:r>
-              <a:t>• [solution 要点2]</a:t>
+              <a:t>• Built-in model monitoring</a:t>
             </a:r>
             <a:br/>
             <a:r>
-              <a:t>• [solution 要点3]</a:t>
+              <a:t>• Zero-config scaling</a:t>
             </a:r>
           </a:p>
         </p:txBody>
@@ -4016,7 +4016,7 @@
               </a:defRPr>
             </a:pPr>
             <a:r>
-              <a:t>{Attention hook}</a:t>
+              <a:t>How AI Platform works</a:t>
             </a:r>
           </a:p>
         </p:txBody>
@@ -4052,15 +4052,15 @@
               </a:defRPr>
             </a:pPr>
             <a:r>
-              <a:t>• [product 要点1]</a:t>
+              <a:t>• Connect: Integrate with your existing tools in minutes, not months</a:t>
             </a:r>
             <a:br/>
             <a:r>
-              <a:t>• [product 要点2]</a:t>
+              <a:t>• Automate: Build intelligent workflows with our visual designer</a:t>
             </a:r>
             <a:br/>
             <a:r>
-              <a:t>• [product 要点3]</a:t>
+              <a:t>• Optimize: AI continuously improves your processes</a:t>
             </a:r>
           </a:p>
         </p:txBody>
@@ -4123,7 +4123,7 @@
               </a:defRPr>
             </a:pPr>
             <a:r>
-              <a:t>{metric1} | {metric2} | {metric3}</a:t>
+              <a:t>The numbers speak for themselves</a:t>
             </a:r>
           </a:p>
         </p:txBody>
@@ -4158,7 +4158,7 @@
               </a:defRPr>
             </a:pPr>
             <a:r>
-              <a:t>[N]+</a:t>
+              <a:t>500+</a:t>
             </a:r>
           </a:p>
           <a:p>
@@ -4170,7 +4170,7 @@
               </a:defRPr>
             </a:pPr>
             <a:r>
-              <a:t>用户数</a:t>
+              <a:t>Models Deployed</a:t>
             </a:r>
           </a:p>
         </p:txBody>
@@ -4205,7 +4205,7 @@
               </a:defRPr>
             </a:pPr>
             <a:r>
-              <a:t>[X]%</a:t>
+              <a:t>&lt;10ms</a:t>
             </a:r>
           </a:p>
           <a:p>
@@ -4217,7 +4217,7 @@
               </a:defRPr>
             </a:pPr>
             <a:r>
-              <a:t>留存率</a:t>
+              <a:t>P99 Latency</a:t>
             </a:r>
           </a:p>
         </p:txBody>
@@ -4252,7 +4252,7 @@
               </a:defRPr>
             </a:pPr>
             <a:r>
-              <a:t>[X]x</a:t>
+              <a:t>99.7%</a:t>
             </a:r>
           </a:p>
           <a:p>
@@ -4264,7 +4264,7 @@
               </a:defRPr>
             </a:pPr>
             <a:r>
-              <a:t>增长率</a:t>
+              <a:t>Accuracy</a:t>
             </a:r>
           </a:p>
         </p:txBody>
@@ -4299,7 +4299,7 @@
               </a:defRPr>
             </a:pPr>
             <a:r>
-              <a:t>$[X]M</a:t>
+              <a:t>12K+</a:t>
             </a:r>
           </a:p>
           <a:p>
@@ -4311,7 +4311,7 @@
               </a:defRPr>
             </a:pPr>
             <a:r>
-              <a:t>ARR</a:t>
+              <a:t>Developers</a:t>
             </a:r>
           </a:p>
         </p:txBody>
@@ -4417,7 +4417,7 @@
               </a:defRPr>
             </a:pPr>
             <a:r>
-              <a:t>{Attention hook}</a:t>
+              <a:t>A massive, underserved Deep Tech / AI market</a:t>
             </a:r>
           </a:p>
         </p:txBody>
@@ -4453,15 +4453,15 @@
               </a:defRPr>
             </a:pPr>
             <a:r>
-              <a:t>• [market 要点1]</a:t>
+              <a:t>• Total addressable market: $47B and growing at 23% CAGR</a:t>
             </a:r>
             <a:br/>
             <a:r>
-              <a:t>• [market 要点2]</a:t>
+              <a:t>• Only 12% of enterprises have adopted modern solutions</a:t>
             </a:r>
             <a:br/>
             <a:r>
-              <a:t>• [market 要点3]</a:t>
+              <a:t>• Regulatory tailwinds are accelerating adoption globally</a:t>
             </a:r>
           </a:p>
         </p:txBody>
@@ -4524,7 +4524,7 @@
               </a:defRPr>
             </a:pPr>
             <a:r>
-              <a:t>{Attention hook}</a:t>
+              <a:t>A business model built for scale</a:t>
             </a:r>
           </a:p>
         </p:txBody>
@@ -4560,15 +4560,15 @@
               </a:defRPr>
             </a:pPr>
             <a:r>
-              <a:t>• [business 要点1]</a:t>
+              <a:t>• SaaS subscription with 85%+ gross margins</a:t>
             </a:r>
             <a:br/>
             <a:r>
-              <a:t>• [business 要点2]</a:t>
+              <a:t>• Land-and-expand: free tier → team → enterprise</a:t>
             </a:r>
             <a:br/>
             <a:r>
-              <a:t>• [business 要点3]</a:t>
+              <a:t>• Net revenue retention: 120%+ (expansion exceeds churn)</a:t>
             </a:r>
           </a:p>
         </p:txBody>
@@ -4631,7 +4631,7 @@
               </a:defRPr>
             </a:pPr>
             <a:r>
-              <a:t>{Attention hook}</a:t>
+              <a:t>Built by operators who've been in your shoes</a:t>
             </a:r>
           </a:p>
         </p:txBody>
@@ -4667,15 +4667,15 @@
               </a:defRPr>
             </a:pPr>
             <a:r>
-              <a:t>• [team 要点1]</a:t>
+              <a:t>• CEO: 15yr industry experience, 2x founder (1 exit)</a:t>
             </a:r>
             <a:br/>
             <a:r>
-              <a:t>• [team 要点2]</a:t>
+              <a:t>• CTO: Former principal engineer at top tech company</a:t>
             </a:r>
             <a:br/>
             <a:r>
-              <a:t>• [team 要点3]</a:t>
+              <a:t>• VP Sales: Built $0→$50M ARR pipeline at previous startup</a:t>
             </a:r>
           </a:p>
         </p:txBody>
@@ -4738,7 +4738,7 @@
               </a:defRPr>
             </a:pPr>
             <a:r>
-              <a:t>{Attention hook}</a:t>
+              <a:t>Strong unit economics, clear path to profitability</a:t>
             </a:r>
           </a:p>
         </p:txBody>
@@ -4774,15 +4774,15 @@
               </a:defRPr>
             </a:pPr>
             <a:r>
-              <a:t>• [financial 要点1]</a:t>
+              <a:t>• Current ARR: $8M, targeting $20M by year-end</a:t>
             </a:r>
             <a:br/>
             <a:r>
-              <a:t>• [financial 要点2]</a:t>
+              <a:t>• CAC payback: 8 months (industry avg: 18 months)</a:t>
             </a:r>
             <a:br/>
             <a:r>
-              <a:t>• [financial 要点3]</a:t>
+              <a:t>• Rule of 40: ARR growth (60%) + FCF margin (-15%) = 45%</a:t>
             </a:r>
           </a:p>
         </p:txBody>

--- a/examples/01-ai-startup-investor-pitch.pptx
+++ b/examples/01-ai-startup-investor-pitch.pptx
@@ -114,6 +114,127 @@
     </a:lvl9pPr>
   </p:defaultTextStyle>
 </p:presentation>
+</file>
+
+<file path=ppt/charts/chart1.xml><?xml version="1.0" encoding="utf-8"?>
+<c:chartSpace xmlns:c="http://schemas.openxmlformats.org/drawingml/2006/chart" xmlns:a="http://schemas.openxmlformats.org/drawingml/2006/main" xmlns:r="http://schemas.openxmlformats.org/officeDocument/2006/relationships">
+  <c:date1904 val="0"/>
+  <c:chart>
+    <c:autoTitleDeleted val="0"/>
+    <c:plotArea>
+      <c:barChart>
+        <c:barDir val="col"/>
+        <c:grouping val="clustered"/>
+        <c:ser>
+          <c:idx val="0"/>
+          <c:order val="0"/>
+          <c:tx>
+            <c:strRef>
+              <c:f>Sheet1!$B$1</c:f>
+              <c:strCache>
+                <c:ptCount val="1"/>
+                <c:pt idx="0">
+                  <c:v>Data</c:v>
+                </c:pt>
+              </c:strCache>
+            </c:strRef>
+          </c:tx>
+          <c:spPr>
+            <a:solidFill>
+              <a:srgbClr val="6366F1"/>
+            </a:solidFill>
+          </c:spPr>
+          <c:cat>
+            <c:strRef>
+              <c:f>Sheet1!$A$2:$A$5</c:f>
+              <c:strCache>
+                <c:ptCount val="4"/>
+                <c:pt idx="0">
+                  <c:v>Baseline</c:v>
+                </c:pt>
+                <c:pt idx="1">
+                  <c:v>v1.0</c:v>
+                </c:pt>
+                <c:pt idx="2">
+                  <c:v>v2.0</c:v>
+                </c:pt>
+                <c:pt idx="3">
+                  <c:v>v3.0</c:v>
+                </c:pt>
+              </c:strCache>
+            </c:strRef>
+          </c:cat>
+          <c:val>
+            <c:numRef>
+              <c:f>Sheet1!$B$2:$B$5</c:f>
+              <c:numCache>
+                <c:formatCode>General</c:formatCode>
+                <c:ptCount val="4"/>
+                <c:pt idx="0">
+                  <c:v>45</c:v>
+                </c:pt>
+                <c:pt idx="1">
+                  <c:v>72</c:v>
+                </c:pt>
+                <c:pt idx="2">
+                  <c:v>88</c:v>
+                </c:pt>
+                <c:pt idx="3">
+                  <c:v>97</c:v>
+                </c:pt>
+              </c:numCache>
+            </c:numRef>
+          </c:val>
+        </c:ser>
+        <c:axId val="-2068027336"/>
+        <c:axId val="-2113994440"/>
+      </c:barChart>
+      <c:catAx>
+        <c:axId val="-2068027336"/>
+        <c:scaling>
+          <c:orientation val="minMax"/>
+        </c:scaling>
+        <c:delete val="0"/>
+        <c:axPos val="b"/>
+        <c:majorTickMark val="out"/>
+        <c:minorTickMark val="none"/>
+        <c:tickLblPos val="nextTo"/>
+        <c:crossAx val="-2113994440"/>
+        <c:crosses val="autoZero"/>
+        <c:auto val="1"/>
+        <c:lblAlgn val="ctr"/>
+        <c:lblOffset val="100"/>
+        <c:noMultiLvlLbl val="0"/>
+      </c:catAx>
+      <c:valAx>
+        <c:axId val="-2113994440"/>
+        <c:scaling/>
+        <c:delete val="0"/>
+        <c:axPos val="l"/>
+        <c:majorGridlines/>
+        <c:majorTickMark val="out"/>
+        <c:minorTickMark val="none"/>
+        <c:tickLblPos val="nextTo"/>
+        <c:crossAx val="-2068027336"/>
+        <c:crosses val="autoZero"/>
+      </c:valAx>
+    </c:plotArea>
+    <c:dispBlanksAs val="gap"/>
+  </c:chart>
+  <c:txPr>
+    <a:bodyPr/>
+    <a:lstStyle/>
+    <a:p>
+      <a:pPr>
+        <a:defRPr sz="1800"/>
+      </a:pPr>
+      <a:endParaRPr lang="en-US"/>
+    </a:p>
+  </c:txPr>
+  <c:externalData r:id="rId1">
+    <c:autoUpdate val="0"/>
+  </c:externalData>
+</c:chartSpace>
 </file>
 
 <file path=ppt/slideLayouts/slideLayout1.xml><?xml version="1.0" encoding="utf-8"?>
@@ -3419,7 +3540,50 @@
       <p:grpSpPr/>
       <p:sp>
         <p:nvSpPr>
-          <p:cNvPr id="2" name="TextBox 1"/>
+          <p:cNvPr id="2" name="Rectangle 1"/>
+          <p:cNvSpPr/>
+          <p:nvPr/>
+        </p:nvSpPr>
+        <p:spPr>
+          <a:xfrm>
+            <a:off x="0" y="2560320"/>
+            <a:ext cx="12191695" cy="54864"/>
+          </a:xfrm>
+          <a:prstGeom prst="rect">
+            <a:avLst/>
+          </a:prstGeom>
+          <a:solidFill>
+            <a:srgbClr val="22D3EE"/>
+          </a:solidFill>
+          <a:ln>
+            <a:noFill/>
+          </a:ln>
+        </p:spPr>
+        <p:style>
+          <a:lnRef idx="1">
+            <a:schemeClr val="accent1"/>
+          </a:lnRef>
+          <a:fillRef idx="3">
+            <a:schemeClr val="accent1"/>
+          </a:fillRef>
+          <a:effectRef idx="2">
+            <a:schemeClr val="accent1"/>
+          </a:effectRef>
+          <a:fontRef idx="minor">
+            <a:schemeClr val="lt1"/>
+          </a:fontRef>
+        </p:style>
+        <p:txBody>
+          <a:bodyPr rtlCol="0" anchor="ctr"/>
+          <a:lstStyle/>
+          <a:p>
+            <a:pPr algn="ctr"/>
+          </a:p>
+        </p:txBody>
+      </p:sp>
+      <p:sp>
+        <p:nvSpPr>
+          <p:cNvPr id="3" name="TextBox 2"/>
           <p:cNvSpPr txBox="1"/>
           <p:nvPr/>
         </p:nvSpPr>
@@ -3455,7 +3619,7 @@
       </p:sp>
       <p:sp>
         <p:nvSpPr>
-          <p:cNvPr id="3" name="TextBox 2"/>
+          <p:cNvPr id="4" name="TextBox 3"/>
           <p:cNvSpPr txBox="1"/>
           <p:nvPr/>
         </p:nvSpPr>
@@ -3491,22 +3655,22 @@
       </p:sp>
       <p:sp>
         <p:nvSpPr>
-          <p:cNvPr id="4" name="Rectangle 3"/>
+          <p:cNvPr id="5" name="Rounded Rectangle 4"/>
           <p:cNvSpPr/>
           <p:nvPr/>
         </p:nvSpPr>
         <p:spPr>
           <a:xfrm>
-            <a:off x="5410504" y="274320"/>
+            <a:off x="5410504" y="365760"/>
             <a:ext cx="1371600" cy="457200"/>
           </a:xfrm>
-          <a:prstGeom prst="rect">
+          <a:prstGeom prst="roundRect">
             <a:avLst/>
           </a:prstGeom>
           <a:solidFill>
             <a:srgbClr val="1E293B"/>
           </a:solidFill>
-          <a:ln>
+          <a:ln w="12700">
             <a:solidFill>
               <a:srgbClr val="334155"/>
             </a:solidFill>
@@ -3538,7 +3702,7 @@
               </a:defRPr>
             </a:pPr>
             <a:r>
-              <a:t>[图片: abstract technology innovation]</a:t>
+              <a:t>abstract technology innovation</a:t>
             </a:r>
           </a:p>
         </p:txBody>
@@ -3572,14 +3736,57 @@
       <p:grpSpPr/>
       <p:sp>
         <p:nvSpPr>
-          <p:cNvPr id="2" name="TextBox 1"/>
+          <p:cNvPr id="2" name="Rectangle 1"/>
+          <p:cNvSpPr/>
+          <p:nvPr/>
+        </p:nvSpPr>
+        <p:spPr>
+          <a:xfrm>
+            <a:off x="0" y="0"/>
+            <a:ext cx="12191695" cy="54864"/>
+          </a:xfrm>
+          <a:prstGeom prst="rect">
+            <a:avLst/>
+          </a:prstGeom>
+          <a:solidFill>
+            <a:srgbClr val="22D3EE"/>
+          </a:solidFill>
+          <a:ln>
+            <a:noFill/>
+          </a:ln>
+        </p:spPr>
+        <p:style>
+          <a:lnRef idx="1">
+            <a:schemeClr val="accent1"/>
+          </a:lnRef>
+          <a:fillRef idx="3">
+            <a:schemeClr val="accent1"/>
+          </a:fillRef>
+          <a:effectRef idx="2">
+            <a:schemeClr val="accent1"/>
+          </a:effectRef>
+          <a:fontRef idx="minor">
+            <a:schemeClr val="lt1"/>
+          </a:fontRef>
+        </p:style>
+        <p:txBody>
+          <a:bodyPr rtlCol="0" anchor="ctr"/>
+          <a:lstStyle/>
+          <a:p>
+            <a:pPr algn="ctr"/>
+          </a:p>
+        </p:txBody>
+      </p:sp>
+      <p:sp>
+        <p:nvSpPr>
+          <p:cNvPr id="3" name="TextBox 2"/>
           <p:cNvSpPr txBox="1"/>
           <p:nvPr/>
         </p:nvSpPr>
         <p:spPr>
           <a:xfrm>
             <a:off x="1371600" y="1828800"/>
-            <a:ext cx="9448495" cy="1371600"/>
+            <a:ext cx="9448495" cy="1097280"/>
           </a:xfrm>
           <a:prstGeom prst="rect">
             <a:avLst/>
@@ -3593,7 +3800,7 @@
           <a:lstStyle/>
           <a:p>
             <a:pPr algn="ctr">
-              <a:defRPr sz="4400" b="1">
+              <a:defRPr sz="4000" b="1">
                 <a:solidFill>
                   <a:srgbClr val="F8FAFC"/>
                 </a:solidFill>
@@ -3608,14 +3815,14 @@
       </p:sp>
       <p:sp>
         <p:nvSpPr>
-          <p:cNvPr id="3" name="TextBox 2"/>
+          <p:cNvPr id="4" name="TextBox 3"/>
           <p:cNvSpPr txBox="1"/>
           <p:nvPr/>
         </p:nvSpPr>
         <p:spPr>
           <a:xfrm>
-            <a:off x="2286000" y="3474720"/>
-            <a:ext cx="7619695" cy="731520"/>
+            <a:off x="2286000" y="3200400"/>
+            <a:ext cx="7619695" cy="640080"/>
           </a:xfrm>
           <a:prstGeom prst="rect">
             <a:avLst/>
@@ -3629,7 +3836,7 @@
           <a:lstStyle/>
           <a:p>
             <a:pPr algn="ctr">
-              <a:defRPr sz="2000" b="0">
+              <a:defRPr sz="1800" b="0">
                 <a:solidFill>
                   <a:srgbClr val="64748B"/>
                 </a:solidFill>
@@ -3644,13 +3851,13 @@
       </p:sp>
       <p:sp>
         <p:nvSpPr>
-          <p:cNvPr id="4" name="Rounded Rectangle 3"/>
+          <p:cNvPr id="5" name="Rounded Rectangle 4"/>
           <p:cNvSpPr/>
           <p:nvPr/>
         </p:nvSpPr>
         <p:spPr>
           <a:xfrm>
-            <a:off x="4267504" y="4572000"/>
+            <a:off x="4267504" y="4389120"/>
             <a:ext cx="3657600" cy="731520"/>
           </a:xfrm>
           <a:prstGeom prst="roundRect">
@@ -3663,9 +3870,9 @@
             <a:noFill/>
           </a:ln>
           <a:effectLst>
-            <a:outerShdw blurRad="76200" dist="38100" dir="5400000" algn="tl" rotWithShape="0">
+            <a:outerShdw blurRad="101600" dist="38100" dir="5400000" algn="tl" rotWithShape="0">
               <a:srgbClr val="000000">
-                <a:alpha val="25000"/>
+                <a:alpha val="20000"/>
               </a:srgbClr>
             </a:outerShdw>
           </a:effectLst>
@@ -3730,14 +3937,57 @@
       <p:grpSpPr/>
       <p:sp>
         <p:nvSpPr>
-          <p:cNvPr id="2" name="TextBox 1"/>
+          <p:cNvPr id="2" name="Rectangle 1"/>
+          <p:cNvSpPr/>
+          <p:nvPr/>
+        </p:nvSpPr>
+        <p:spPr>
+          <a:xfrm>
+            <a:off x="0" y="0"/>
+            <a:ext cx="73152" cy="6858000"/>
+          </a:xfrm>
+          <a:prstGeom prst="rect">
+            <a:avLst/>
+          </a:prstGeom>
+          <a:solidFill>
+            <a:srgbClr val="6366F1"/>
+          </a:solidFill>
+          <a:ln>
+            <a:noFill/>
+          </a:ln>
+        </p:spPr>
+        <p:style>
+          <a:lnRef idx="1">
+            <a:schemeClr val="accent1"/>
+          </a:lnRef>
+          <a:fillRef idx="3">
+            <a:schemeClr val="accent1"/>
+          </a:fillRef>
+          <a:effectRef idx="2">
+            <a:schemeClr val="accent1"/>
+          </a:effectRef>
+          <a:fontRef idx="minor">
+            <a:schemeClr val="lt1"/>
+          </a:fontRef>
+        </p:style>
+        <p:txBody>
+          <a:bodyPr rtlCol="0" anchor="ctr"/>
+          <a:lstStyle/>
+          <a:p>
+            <a:pPr algn="ctr"/>
+          </a:p>
+        </p:txBody>
+      </p:sp>
+      <p:sp>
+        <p:nvSpPr>
+          <p:cNvPr id="3" name="TextBox 2"/>
           <p:cNvSpPr txBox="1"/>
           <p:nvPr/>
         </p:nvSpPr>
         <p:spPr>
           <a:xfrm>
-            <a:off x="685800" y="365760"/>
-            <a:ext cx="10820095" cy="731520"/>
+            <a:off x="822960" y="457200"/>
+            <a:ext cx="10545775" cy="640080"/>
           </a:xfrm>
           <a:prstGeom prst="rect">
             <a:avLst/>
@@ -3766,14 +4016,57 @@
       </p:sp>
       <p:sp>
         <p:nvSpPr>
-          <p:cNvPr id="3" name="TextBox 2"/>
+          <p:cNvPr id="4" name="Rectangle 3"/>
+          <p:cNvSpPr/>
+          <p:nvPr/>
+        </p:nvSpPr>
+        <p:spPr>
+          <a:xfrm>
+            <a:off x="822960" y="1143000"/>
+            <a:ext cx="1828800" cy="36576"/>
+          </a:xfrm>
+          <a:prstGeom prst="rect">
+            <a:avLst/>
+          </a:prstGeom>
+          <a:solidFill>
+            <a:srgbClr val="22D3EE"/>
+          </a:solidFill>
+          <a:ln>
+            <a:noFill/>
+          </a:ln>
+        </p:spPr>
+        <p:style>
+          <a:lnRef idx="1">
+            <a:schemeClr val="accent1"/>
+          </a:lnRef>
+          <a:fillRef idx="3">
+            <a:schemeClr val="accent1"/>
+          </a:fillRef>
+          <a:effectRef idx="2">
+            <a:schemeClr val="accent1"/>
+          </a:effectRef>
+          <a:fontRef idx="minor">
+            <a:schemeClr val="lt1"/>
+          </a:fontRef>
+        </p:style>
+        <p:txBody>
+          <a:bodyPr rtlCol="0" anchor="ctr"/>
+          <a:lstStyle/>
+          <a:p>
+            <a:pPr algn="ctr"/>
+          </a:p>
+        </p:txBody>
+      </p:sp>
+      <p:sp>
+        <p:nvSpPr>
+          <p:cNvPr id="5" name="TextBox 4"/>
           <p:cNvSpPr txBox="1"/>
           <p:nvPr/>
         </p:nvSpPr>
         <p:spPr>
           <a:xfrm>
-            <a:off x="685800" y="1371600"/>
-            <a:ext cx="10820095" cy="4572000"/>
+            <a:off x="822960" y="1463040"/>
+            <a:ext cx="6400800" cy="4572000"/>
           </a:xfrm>
           <a:prstGeom prst="rect">
             <a:avLst/>
@@ -3786,7 +4079,13 @@
           </a:bodyPr>
           <a:lstStyle/>
           <a:p>
-            <a:pPr algn="l">
+            <a:pPr lvl="1" algn="l">
+              <a:spcBef>
+                <a:spcPts val="400"/>
+              </a:spcBef>
+              <a:spcAft>
+                <a:spcPts val="800"/>
+              </a:spcAft>
               <a:defRPr sz="1600" b="0">
                 <a:solidFill>
                   <a:srgbClr val="F8FAFC"/>
@@ -3795,15 +4094,99 @@
               </a:defRPr>
             </a:pPr>
             <a:r>
-              <a:t>• Training takes weeks for production models</a:t>
-            </a:r>
-            <a:br/>
-            <a:r>
-              <a:t>• GPU cloud costs are exploding 3x year-over-year</a:t>
-            </a:r>
-            <a:br/>
-            <a:r>
-              <a:t>• Lab models fail silently in production environments</a:t>
+              <a:t>Training takes weeks for production models</a:t>
+            </a:r>
+          </a:p>
+          <a:p>
+            <a:pPr lvl="1" algn="l">
+              <a:spcBef>
+                <a:spcPts val="400"/>
+              </a:spcBef>
+              <a:spcAft>
+                <a:spcPts val="800"/>
+              </a:spcAft>
+              <a:defRPr sz="1600" b="0">
+                <a:solidFill>
+                  <a:srgbClr val="F8FAFC"/>
+                </a:solidFill>
+                <a:latin typeface="Inter"/>
+              </a:defRPr>
+            </a:pPr>
+            <a:r>
+              <a:t>GPU cloud costs are exploding 3x year-over-year</a:t>
+            </a:r>
+          </a:p>
+          <a:p>
+            <a:pPr lvl="1" algn="l">
+              <a:spcBef>
+                <a:spcPts val="400"/>
+              </a:spcBef>
+              <a:spcAft>
+                <a:spcPts val="800"/>
+              </a:spcAft>
+              <a:defRPr sz="1600" b="0">
+                <a:solidFill>
+                  <a:srgbClr val="F8FAFC"/>
+                </a:solidFill>
+                <a:latin typeface="Inter"/>
+              </a:defRPr>
+            </a:pPr>
+            <a:r>
+              <a:t>Lab models fail silently in production environments</a:t>
+            </a:r>
+          </a:p>
+        </p:txBody>
+      </p:sp>
+      <p:sp>
+        <p:nvSpPr>
+          <p:cNvPr id="6" name="Rounded Rectangle 5"/>
+          <p:cNvSpPr/>
+          <p:nvPr/>
+        </p:nvSpPr>
+        <p:spPr>
+          <a:xfrm>
+            <a:off x="7772400" y="1463040"/>
+            <a:ext cx="3657600" cy="4572000"/>
+          </a:xfrm>
+          <a:prstGeom prst="roundRect">
+            <a:avLst/>
+          </a:prstGeom>
+          <a:solidFill>
+            <a:srgbClr val="1E293B"/>
+          </a:solidFill>
+          <a:ln w="12700">
+            <a:solidFill>
+              <a:srgbClr val="334155"/>
+            </a:solidFill>
+          </a:ln>
+        </p:spPr>
+        <p:style>
+          <a:lnRef idx="1">
+            <a:schemeClr val="accent1"/>
+          </a:lnRef>
+          <a:fillRef idx="3">
+            <a:schemeClr val="accent1"/>
+          </a:fillRef>
+          <a:effectRef idx="2">
+            <a:schemeClr val="accent1"/>
+          </a:effectRef>
+          <a:fontRef idx="minor">
+            <a:schemeClr val="lt1"/>
+          </a:fontRef>
+        </p:style>
+        <p:txBody>
+          <a:bodyPr rtlCol="0" anchor="ctr" wrap="square"/>
+          <a:lstStyle/>
+          <a:p>
+            <a:pPr algn="ctr">
+              <a:defRPr sz="1200">
+                <a:solidFill>
+                  <a:srgbClr val="64748B"/>
+                </a:solidFill>
+              </a:defRPr>
+            </a:pPr>
+            <a:r>
+              <a:t>frustration stress problem dark</a:t>
             </a:r>
           </a:p>
         </p:txBody>
@@ -3844,7 +4227,7 @@
         <p:spPr>
           <a:xfrm>
             <a:off x="0" y="0"/>
-            <a:ext cx="12191695" cy="73152"/>
+            <a:ext cx="12191695" cy="54864"/>
           </a:xfrm>
           <a:prstGeom prst="rect">
             <a:avLst/>
@@ -3886,8 +4269,8 @@
         </p:nvSpPr>
         <p:spPr>
           <a:xfrm>
-            <a:off x="685800" y="365760"/>
-            <a:ext cx="10820095" cy="731520"/>
+            <a:off x="822960" y="457200"/>
+            <a:ext cx="10545775" cy="640080"/>
           </a:xfrm>
           <a:prstGeom prst="rect">
             <a:avLst/>
@@ -3916,45 +4299,344 @@
       </p:sp>
       <p:sp>
         <p:nvSpPr>
-          <p:cNvPr id="4" name="TextBox 3"/>
-          <p:cNvSpPr txBox="1"/>
+          <p:cNvPr id="4" name="Rectangle 3"/>
+          <p:cNvSpPr/>
           <p:nvPr/>
         </p:nvSpPr>
         <p:spPr>
           <a:xfrm>
-            <a:off x="685800" y="1371600"/>
-            <a:ext cx="10820095" cy="4572000"/>
+            <a:off x="822960" y="1143000"/>
+            <a:ext cx="1828800" cy="36576"/>
           </a:xfrm>
           <a:prstGeom prst="rect">
             <a:avLst/>
           </a:prstGeom>
-          <a:noFill/>
-        </p:spPr>
-        <p:txBody>
-          <a:bodyPr wrap="square">
-            <a:spAutoFit/>
-          </a:bodyPr>
+          <a:solidFill>
+            <a:srgbClr val="22D3EE"/>
+          </a:solidFill>
+          <a:ln>
+            <a:noFill/>
+          </a:ln>
+        </p:spPr>
+        <p:style>
+          <a:lnRef idx="1">
+            <a:schemeClr val="accent1"/>
+          </a:lnRef>
+          <a:fillRef idx="3">
+            <a:schemeClr val="accent1"/>
+          </a:fillRef>
+          <a:effectRef idx="2">
+            <a:schemeClr val="accent1"/>
+          </a:effectRef>
+          <a:fontRef idx="minor">
+            <a:schemeClr val="lt1"/>
+          </a:fontRef>
+        </p:style>
+        <p:txBody>
+          <a:bodyPr rtlCol="0" anchor="ctr"/>
+          <a:lstStyle/>
+          <a:p>
+            <a:pPr algn="ctr"/>
+          </a:p>
+        </p:txBody>
+      </p:sp>
+      <p:sp>
+        <p:nvSpPr>
+          <p:cNvPr id="5" name="Rounded Rectangle 4"/>
+          <p:cNvSpPr/>
+          <p:nvPr/>
+        </p:nvSpPr>
+        <p:spPr>
+          <a:xfrm>
+            <a:off x="822960" y="1554480"/>
+            <a:ext cx="3332073" cy="4389120"/>
+          </a:xfrm>
+          <a:prstGeom prst="roundRect">
+            <a:avLst/>
+          </a:prstGeom>
+          <a:solidFill>
+            <a:srgbClr val="1E293B"/>
+          </a:solidFill>
+          <a:ln w="12700">
+            <a:solidFill>
+              <a:srgbClr val="334155"/>
+            </a:solidFill>
+          </a:ln>
+        </p:spPr>
+        <p:style>
+          <a:lnRef idx="1">
+            <a:schemeClr val="accent1"/>
+          </a:lnRef>
+          <a:fillRef idx="3">
+            <a:schemeClr val="accent1"/>
+          </a:fillRef>
+          <a:effectRef idx="2">
+            <a:schemeClr val="accent1"/>
+          </a:effectRef>
+          <a:fontRef idx="minor">
+            <a:schemeClr val="lt1"/>
+          </a:fontRef>
+        </p:style>
+        <p:txBody>
+          <a:bodyPr rtlCol="0" anchor="ctr" wrap="square" lIns="228600" rIns="228600" tIns="457200"/>
           <a:lstStyle/>
           <a:p>
             <a:pPr algn="l">
-              <a:defRPr sz="1600" b="0">
+              <a:spcAft>
+                <a:spcPts val="600"/>
+              </a:spcAft>
+              <a:defRPr sz="1400">
                 <a:solidFill>
                   <a:srgbClr val="F8FAFC"/>
                 </a:solidFill>
-                <a:latin typeface="Inter"/>
               </a:defRPr>
             </a:pPr>
             <a:r>
-              <a:t>• Auto-optimized inference</a:t>
-            </a:r>
-            <a:br/>
-            <a:r>
-              <a:t>• Built-in model monitoring</a:t>
-            </a:r>
-            <a:br/>
-            <a:r>
-              <a:t>• Zero-config scaling</a:t>
-            </a:r>
+              <a:t>Auto-optimized inference</a:t>
+            </a:r>
+          </a:p>
+        </p:txBody>
+      </p:sp>
+      <p:sp>
+        <p:nvSpPr>
+          <p:cNvPr id="6" name="Rectangle 5"/>
+          <p:cNvSpPr/>
+          <p:nvPr/>
+        </p:nvSpPr>
+        <p:spPr>
+          <a:xfrm>
+            <a:off x="960120" y="1737360"/>
+            <a:ext cx="457200" cy="54864"/>
+          </a:xfrm>
+          <a:prstGeom prst="rect">
+            <a:avLst/>
+          </a:prstGeom>
+          <a:solidFill>
+            <a:srgbClr val="22D3EE"/>
+          </a:solidFill>
+          <a:ln>
+            <a:noFill/>
+          </a:ln>
+        </p:spPr>
+        <p:style>
+          <a:lnRef idx="1">
+            <a:schemeClr val="accent1"/>
+          </a:lnRef>
+          <a:fillRef idx="3">
+            <a:schemeClr val="accent1"/>
+          </a:fillRef>
+          <a:effectRef idx="2">
+            <a:schemeClr val="accent1"/>
+          </a:effectRef>
+          <a:fontRef idx="minor">
+            <a:schemeClr val="lt1"/>
+          </a:fontRef>
+        </p:style>
+        <p:txBody>
+          <a:bodyPr rtlCol="0" anchor="ctr"/>
+          <a:lstStyle/>
+          <a:p>
+            <a:pPr algn="ctr"/>
+          </a:p>
+        </p:txBody>
+      </p:sp>
+      <p:sp>
+        <p:nvSpPr>
+          <p:cNvPr id="7" name="Rounded Rectangle 6"/>
+          <p:cNvSpPr/>
+          <p:nvPr/>
+        </p:nvSpPr>
+        <p:spPr>
+          <a:xfrm>
+            <a:off x="4429353" y="1554480"/>
+            <a:ext cx="3332073" cy="4389120"/>
+          </a:xfrm>
+          <a:prstGeom prst="roundRect">
+            <a:avLst/>
+          </a:prstGeom>
+          <a:solidFill>
+            <a:srgbClr val="1E293B"/>
+          </a:solidFill>
+          <a:ln w="12700">
+            <a:solidFill>
+              <a:srgbClr val="334155"/>
+            </a:solidFill>
+          </a:ln>
+        </p:spPr>
+        <p:style>
+          <a:lnRef idx="1">
+            <a:schemeClr val="accent1"/>
+          </a:lnRef>
+          <a:fillRef idx="3">
+            <a:schemeClr val="accent1"/>
+          </a:fillRef>
+          <a:effectRef idx="2">
+            <a:schemeClr val="accent1"/>
+          </a:effectRef>
+          <a:fontRef idx="minor">
+            <a:schemeClr val="lt1"/>
+          </a:fontRef>
+        </p:style>
+        <p:txBody>
+          <a:bodyPr rtlCol="0" anchor="ctr" wrap="square" lIns="228600" rIns="228600" tIns="457200"/>
+          <a:lstStyle/>
+          <a:p>
+            <a:pPr algn="l">
+              <a:spcAft>
+                <a:spcPts val="600"/>
+              </a:spcAft>
+              <a:defRPr sz="1400">
+                <a:solidFill>
+                  <a:srgbClr val="F8FAFC"/>
+                </a:solidFill>
+              </a:defRPr>
+            </a:pPr>
+            <a:r>
+              <a:t>Built-in model monitoring</a:t>
+            </a:r>
+          </a:p>
+        </p:txBody>
+      </p:sp>
+      <p:sp>
+        <p:nvSpPr>
+          <p:cNvPr id="8" name="Rectangle 7"/>
+          <p:cNvSpPr/>
+          <p:nvPr/>
+        </p:nvSpPr>
+        <p:spPr>
+          <a:xfrm>
+            <a:off x="4566513" y="1737360"/>
+            <a:ext cx="457200" cy="54864"/>
+          </a:xfrm>
+          <a:prstGeom prst="rect">
+            <a:avLst/>
+          </a:prstGeom>
+          <a:solidFill>
+            <a:srgbClr val="22D3EE"/>
+          </a:solidFill>
+          <a:ln>
+            <a:noFill/>
+          </a:ln>
+        </p:spPr>
+        <p:style>
+          <a:lnRef idx="1">
+            <a:schemeClr val="accent1"/>
+          </a:lnRef>
+          <a:fillRef idx="3">
+            <a:schemeClr val="accent1"/>
+          </a:fillRef>
+          <a:effectRef idx="2">
+            <a:schemeClr val="accent1"/>
+          </a:effectRef>
+          <a:fontRef idx="minor">
+            <a:schemeClr val="lt1"/>
+          </a:fontRef>
+        </p:style>
+        <p:txBody>
+          <a:bodyPr rtlCol="0" anchor="ctr"/>
+          <a:lstStyle/>
+          <a:p>
+            <a:pPr algn="ctr"/>
+          </a:p>
+        </p:txBody>
+      </p:sp>
+      <p:sp>
+        <p:nvSpPr>
+          <p:cNvPr id="9" name="Rounded Rectangle 8"/>
+          <p:cNvSpPr/>
+          <p:nvPr/>
+        </p:nvSpPr>
+        <p:spPr>
+          <a:xfrm>
+            <a:off x="8036661" y="1554480"/>
+            <a:ext cx="3332073" cy="4389120"/>
+          </a:xfrm>
+          <a:prstGeom prst="roundRect">
+            <a:avLst/>
+          </a:prstGeom>
+          <a:solidFill>
+            <a:srgbClr val="1E293B"/>
+          </a:solidFill>
+          <a:ln w="12700">
+            <a:solidFill>
+              <a:srgbClr val="334155"/>
+            </a:solidFill>
+          </a:ln>
+        </p:spPr>
+        <p:style>
+          <a:lnRef idx="1">
+            <a:schemeClr val="accent1"/>
+          </a:lnRef>
+          <a:fillRef idx="3">
+            <a:schemeClr val="accent1"/>
+          </a:fillRef>
+          <a:effectRef idx="2">
+            <a:schemeClr val="accent1"/>
+          </a:effectRef>
+          <a:fontRef idx="minor">
+            <a:schemeClr val="lt1"/>
+          </a:fontRef>
+        </p:style>
+        <p:txBody>
+          <a:bodyPr rtlCol="0" anchor="ctr" wrap="square" lIns="228600" rIns="228600" tIns="457200"/>
+          <a:lstStyle/>
+          <a:p>
+            <a:pPr algn="l">
+              <a:spcAft>
+                <a:spcPts val="600"/>
+              </a:spcAft>
+              <a:defRPr sz="1400">
+                <a:solidFill>
+                  <a:srgbClr val="F8FAFC"/>
+                </a:solidFill>
+              </a:defRPr>
+            </a:pPr>
+            <a:r>
+              <a:t>Zero-config scaling</a:t>
+            </a:r>
+          </a:p>
+        </p:txBody>
+      </p:sp>
+      <p:sp>
+        <p:nvSpPr>
+          <p:cNvPr id="10" name="Rectangle 9"/>
+          <p:cNvSpPr/>
+          <p:nvPr/>
+        </p:nvSpPr>
+        <p:spPr>
+          <a:xfrm>
+            <a:off x="8173821" y="1737360"/>
+            <a:ext cx="457200" cy="54864"/>
+          </a:xfrm>
+          <a:prstGeom prst="rect">
+            <a:avLst/>
+          </a:prstGeom>
+          <a:solidFill>
+            <a:srgbClr val="22D3EE"/>
+          </a:solidFill>
+          <a:ln>
+            <a:noFill/>
+          </a:ln>
+        </p:spPr>
+        <p:style>
+          <a:lnRef idx="1">
+            <a:schemeClr val="accent1"/>
+          </a:lnRef>
+          <a:fillRef idx="3">
+            <a:schemeClr val="accent1"/>
+          </a:fillRef>
+          <a:effectRef idx="2">
+            <a:schemeClr val="accent1"/>
+          </a:effectRef>
+          <a:fontRef idx="minor">
+            <a:schemeClr val="lt1"/>
+          </a:fontRef>
+        </p:style>
+        <p:txBody>
+          <a:bodyPr rtlCol="0" anchor="ctr"/>
+          <a:lstStyle/>
+          <a:p>
+            <a:pPr algn="ctr"/>
           </a:p>
         </p:txBody>
       </p:sp>
@@ -3987,14 +4669,68 @@
       <p:grpSpPr/>
       <p:sp>
         <p:nvSpPr>
-          <p:cNvPr id="2" name="TextBox 1"/>
+          <p:cNvPr id="2" name="Rounded Rectangle 1"/>
+          <p:cNvSpPr/>
+          <p:nvPr/>
+        </p:nvSpPr>
+        <p:spPr>
+          <a:xfrm>
+            <a:off x="0" y="0"/>
+            <a:ext cx="6858000" cy="6858000"/>
+          </a:xfrm>
+          <a:prstGeom prst="roundRect">
+            <a:avLst/>
+          </a:prstGeom>
+          <a:solidFill>
+            <a:srgbClr val="1E293B"/>
+          </a:solidFill>
+          <a:ln w="12700">
+            <a:solidFill>
+              <a:srgbClr val="334155"/>
+            </a:solidFill>
+          </a:ln>
+        </p:spPr>
+        <p:style>
+          <a:lnRef idx="1">
+            <a:schemeClr val="accent1"/>
+          </a:lnRef>
+          <a:fillRef idx="3">
+            <a:schemeClr val="accent1"/>
+          </a:fillRef>
+          <a:effectRef idx="2">
+            <a:schemeClr val="accent1"/>
+          </a:effectRef>
+          <a:fontRef idx="minor">
+            <a:schemeClr val="lt1"/>
+          </a:fontRef>
+        </p:style>
+        <p:txBody>
+          <a:bodyPr rtlCol="0" anchor="ctr" wrap="square"/>
+          <a:lstStyle/>
+          <a:p>
+            <a:pPr algn="ctr">
+              <a:defRPr sz="1200">
+                <a:solidFill>
+                  <a:srgbClr val="64748B"/>
+                </a:solidFill>
+              </a:defRPr>
+            </a:pPr>
+            <a:r>
+              <a:t>product interface app modern</a:t>
+            </a:r>
+          </a:p>
+        </p:txBody>
+      </p:sp>
+      <p:sp>
+        <p:nvSpPr>
+          <p:cNvPr id="3" name="TextBox 2"/>
           <p:cNvSpPr txBox="1"/>
           <p:nvPr/>
         </p:nvSpPr>
         <p:spPr>
           <a:xfrm>
-            <a:off x="685800" y="365760"/>
-            <a:ext cx="10820095" cy="731520"/>
+            <a:off x="7315200" y="1371600"/>
+            <a:ext cx="4389120" cy="914400"/>
           </a:xfrm>
           <a:prstGeom prst="rect">
             <a:avLst/>
@@ -4023,14 +4759,14 @@
       </p:sp>
       <p:sp>
         <p:nvSpPr>
-          <p:cNvPr id="3" name="TextBox 2"/>
+          <p:cNvPr id="4" name="TextBox 3"/>
           <p:cNvSpPr txBox="1"/>
           <p:nvPr/>
         </p:nvSpPr>
         <p:spPr>
           <a:xfrm>
-            <a:off x="685800" y="1371600"/>
-            <a:ext cx="10820095" cy="4572000"/>
+            <a:off x="7315200" y="2560320"/>
+            <a:ext cx="4389120" cy="3200400"/>
           </a:xfrm>
           <a:prstGeom prst="rect">
             <a:avLst/>
@@ -4043,7 +4779,13 @@
           </a:bodyPr>
           <a:lstStyle/>
           <a:p>
-            <a:pPr algn="l">
+            <a:pPr lvl="1" algn="l">
+              <a:spcBef>
+                <a:spcPts val="400"/>
+              </a:spcBef>
+              <a:spcAft>
+                <a:spcPts val="800"/>
+              </a:spcAft>
               <a:defRPr sz="1600" b="0">
                 <a:solidFill>
                   <a:srgbClr val="F8FAFC"/>
@@ -4052,15 +4794,45 @@
               </a:defRPr>
             </a:pPr>
             <a:r>
-              <a:t>• Connect: Integrate with your existing tools in minutes, not months</a:t>
-            </a:r>
-            <a:br/>
-            <a:r>
-              <a:t>• Automate: Build intelligent workflows with our visual designer</a:t>
-            </a:r>
-            <a:br/>
-            <a:r>
-              <a:t>• Optimize: AI continuously improves your processes</a:t>
+              <a:t>Connect: Integrate with your existing tools in minutes, not months</a:t>
+            </a:r>
+          </a:p>
+          <a:p>
+            <a:pPr lvl="1" algn="l">
+              <a:spcBef>
+                <a:spcPts val="400"/>
+              </a:spcBef>
+              <a:spcAft>
+                <a:spcPts val="800"/>
+              </a:spcAft>
+              <a:defRPr sz="1600" b="0">
+                <a:solidFill>
+                  <a:srgbClr val="F8FAFC"/>
+                </a:solidFill>
+                <a:latin typeface="Inter"/>
+              </a:defRPr>
+            </a:pPr>
+            <a:r>
+              <a:t>Automate: Build intelligent workflows with our visual designer</a:t>
+            </a:r>
+          </a:p>
+          <a:p>
+            <a:pPr lvl="1" algn="l">
+              <a:spcBef>
+                <a:spcPts val="400"/>
+              </a:spcBef>
+              <a:spcAft>
+                <a:spcPts val="800"/>
+              </a:spcAft>
+              <a:defRPr sz="1600" b="0">
+                <a:solidFill>
+                  <a:srgbClr val="F8FAFC"/>
+                </a:solidFill>
+                <a:latin typeface="Inter"/>
+              </a:defRPr>
+            </a:pPr>
+            <a:r>
+              <a:t>Optimize: AI continuously improves your processes</a:t>
             </a:r>
           </a:p>
         </p:txBody>
@@ -4100,8 +4872,8 @@
         </p:nvSpPr>
         <p:spPr>
           <a:xfrm>
-            <a:off x="685800" y="365760"/>
-            <a:ext cx="10820095" cy="731520"/>
+            <a:off x="822960" y="457200"/>
+            <a:ext cx="10545775" cy="640080"/>
           </a:xfrm>
           <a:prstGeom prst="rect">
             <a:avLst/>
@@ -4130,28 +4902,90 @@
       </p:sp>
       <p:sp>
         <p:nvSpPr>
-          <p:cNvPr id="3" name="TextBox 2"/>
-          <p:cNvSpPr txBox="1"/>
+          <p:cNvPr id="3" name="Rectangle 2"/>
+          <p:cNvSpPr/>
           <p:nvPr/>
         </p:nvSpPr>
         <p:spPr>
           <a:xfrm>
-            <a:off x="685800" y="2286000"/>
-            <a:ext cx="2476195" cy="3200400"/>
+            <a:off x="822960" y="1143000"/>
+            <a:ext cx="1828800" cy="36576"/>
           </a:xfrm>
           <a:prstGeom prst="rect">
             <a:avLst/>
           </a:prstGeom>
-          <a:noFill/>
-        </p:spPr>
-        <p:txBody>
-          <a:bodyPr wrap="square">
-            <a:spAutoFit/>
-          </a:bodyPr>
+          <a:solidFill>
+            <a:srgbClr val="22D3EE"/>
+          </a:solidFill>
+          <a:ln>
+            <a:noFill/>
+          </a:ln>
+        </p:spPr>
+        <p:style>
+          <a:lnRef idx="1">
+            <a:schemeClr val="accent1"/>
+          </a:lnRef>
+          <a:fillRef idx="3">
+            <a:schemeClr val="accent1"/>
+          </a:fillRef>
+          <a:effectRef idx="2">
+            <a:schemeClr val="accent1"/>
+          </a:effectRef>
+          <a:fontRef idx="minor">
+            <a:schemeClr val="lt1"/>
+          </a:fontRef>
+        </p:style>
+        <p:txBody>
+          <a:bodyPr rtlCol="0" anchor="ctr"/>
+          <a:lstStyle/>
+          <a:p>
+            <a:pPr algn="ctr"/>
+          </a:p>
+        </p:txBody>
+      </p:sp>
+      <p:sp>
+        <p:nvSpPr>
+          <p:cNvPr id="4" name="Rounded Rectangle 3"/>
+          <p:cNvSpPr/>
+          <p:nvPr/>
+        </p:nvSpPr>
+        <p:spPr>
+          <a:xfrm>
+            <a:off x="822960" y="1645920"/>
+            <a:ext cx="2476195" cy="2926080"/>
+          </a:xfrm>
+          <a:prstGeom prst="roundRect">
+            <a:avLst/>
+          </a:prstGeom>
+          <a:solidFill>
+            <a:srgbClr val="1E293B"/>
+          </a:solidFill>
+          <a:ln w="12700">
+            <a:solidFill>
+              <a:srgbClr val="334155"/>
+            </a:solidFill>
+          </a:ln>
+        </p:spPr>
+        <p:style>
+          <a:lnRef idx="1">
+            <a:schemeClr val="accent1"/>
+          </a:lnRef>
+          <a:fillRef idx="3">
+            <a:schemeClr val="accent1"/>
+          </a:fillRef>
+          <a:effectRef idx="2">
+            <a:schemeClr val="accent1"/>
+          </a:effectRef>
+          <a:fontRef idx="minor">
+            <a:schemeClr val="lt1"/>
+          </a:fontRef>
+        </p:style>
+        <p:txBody>
+          <a:bodyPr rtlCol="0" anchor="ctr" wrap="square" lIns="137160" rIns="137160" tIns="274320"/>
           <a:lstStyle/>
           <a:p>
             <a:pPr algn="ctr">
-              <a:defRPr sz="3600" b="1">
+              <a:defRPr sz="4000" b="1">
                 <a:solidFill>
                   <a:srgbClr val="22D3EE"/>
                 </a:solidFill>
@@ -4163,7 +4997,10 @@
           </a:p>
           <a:p>
             <a:pPr algn="ctr">
-              <a:defRPr sz="1400">
+              <a:spcBef>
+                <a:spcPts val="600"/>
+              </a:spcBef>
+              <a:defRPr sz="1200">
                 <a:solidFill>
                   <a:srgbClr val="64748B"/>
                 </a:solidFill>
@@ -4177,28 +5014,47 @@
       </p:sp>
       <p:sp>
         <p:nvSpPr>
-          <p:cNvPr id="4" name="TextBox 3"/>
-          <p:cNvSpPr txBox="1"/>
+          <p:cNvPr id="5" name="Rounded Rectangle 4"/>
+          <p:cNvSpPr/>
           <p:nvPr/>
         </p:nvSpPr>
         <p:spPr>
           <a:xfrm>
-            <a:off x="3619195" y="2286000"/>
-            <a:ext cx="2476195" cy="3200400"/>
-          </a:xfrm>
-          <a:prstGeom prst="rect">
+            <a:off x="3756355" y="1645920"/>
+            <a:ext cx="2476195" cy="2926080"/>
+          </a:xfrm>
+          <a:prstGeom prst="roundRect">
             <a:avLst/>
           </a:prstGeom>
-          <a:noFill/>
-        </p:spPr>
-        <p:txBody>
-          <a:bodyPr wrap="square">
-            <a:spAutoFit/>
-          </a:bodyPr>
+          <a:solidFill>
+            <a:srgbClr val="1E293B"/>
+          </a:solidFill>
+          <a:ln w="12700">
+            <a:solidFill>
+              <a:srgbClr val="334155"/>
+            </a:solidFill>
+          </a:ln>
+        </p:spPr>
+        <p:style>
+          <a:lnRef idx="1">
+            <a:schemeClr val="accent1"/>
+          </a:lnRef>
+          <a:fillRef idx="3">
+            <a:schemeClr val="accent1"/>
+          </a:fillRef>
+          <a:effectRef idx="2">
+            <a:schemeClr val="accent1"/>
+          </a:effectRef>
+          <a:fontRef idx="minor">
+            <a:schemeClr val="lt1"/>
+          </a:fontRef>
+        </p:style>
+        <p:txBody>
+          <a:bodyPr rtlCol="0" anchor="ctr" wrap="square" lIns="137160" rIns="137160" tIns="274320"/>
           <a:lstStyle/>
           <a:p>
             <a:pPr algn="ctr">
-              <a:defRPr sz="3600" b="1">
+              <a:defRPr sz="4000" b="1">
                 <a:solidFill>
                   <a:srgbClr val="22D3EE"/>
                 </a:solidFill>
@@ -4210,7 +5066,10 @@
           </a:p>
           <a:p>
             <a:pPr algn="ctr">
-              <a:defRPr sz="1400">
+              <a:spcBef>
+                <a:spcPts val="600"/>
+              </a:spcBef>
+              <a:defRPr sz="1200">
                 <a:solidFill>
                   <a:srgbClr val="64748B"/>
                 </a:solidFill>
@@ -4224,28 +5083,47 @@
       </p:sp>
       <p:sp>
         <p:nvSpPr>
-          <p:cNvPr id="5" name="TextBox 4"/>
-          <p:cNvSpPr txBox="1"/>
+          <p:cNvPr id="6" name="Rounded Rectangle 5"/>
+          <p:cNvSpPr/>
           <p:nvPr/>
         </p:nvSpPr>
         <p:spPr>
           <a:xfrm>
-            <a:off x="6553504" y="2286000"/>
-            <a:ext cx="2476195" cy="3200400"/>
-          </a:xfrm>
-          <a:prstGeom prst="rect">
+            <a:off x="6690664" y="1645920"/>
+            <a:ext cx="2476195" cy="2926080"/>
+          </a:xfrm>
+          <a:prstGeom prst="roundRect">
             <a:avLst/>
           </a:prstGeom>
-          <a:noFill/>
-        </p:spPr>
-        <p:txBody>
-          <a:bodyPr wrap="square">
-            <a:spAutoFit/>
-          </a:bodyPr>
+          <a:solidFill>
+            <a:srgbClr val="1E293B"/>
+          </a:solidFill>
+          <a:ln w="12700">
+            <a:solidFill>
+              <a:srgbClr val="334155"/>
+            </a:solidFill>
+          </a:ln>
+        </p:spPr>
+        <p:style>
+          <a:lnRef idx="1">
+            <a:schemeClr val="accent1"/>
+          </a:lnRef>
+          <a:fillRef idx="3">
+            <a:schemeClr val="accent1"/>
+          </a:fillRef>
+          <a:effectRef idx="2">
+            <a:schemeClr val="accent1"/>
+          </a:effectRef>
+          <a:fontRef idx="minor">
+            <a:schemeClr val="lt1"/>
+          </a:fontRef>
+        </p:style>
+        <p:txBody>
+          <a:bodyPr rtlCol="0" anchor="ctr" wrap="square" lIns="137160" rIns="137160" tIns="274320"/>
           <a:lstStyle/>
           <a:p>
             <a:pPr algn="ctr">
-              <a:defRPr sz="3600" b="1">
+              <a:defRPr sz="4000" b="1">
                 <a:solidFill>
                   <a:srgbClr val="22D3EE"/>
                 </a:solidFill>
@@ -4257,7 +5135,10 @@
           </a:p>
           <a:p>
             <a:pPr algn="ctr">
-              <a:defRPr sz="1400">
+              <a:spcBef>
+                <a:spcPts val="600"/>
+              </a:spcBef>
+              <a:defRPr sz="1200">
                 <a:solidFill>
                   <a:srgbClr val="64748B"/>
                 </a:solidFill>
@@ -4271,28 +5152,47 @@
       </p:sp>
       <p:sp>
         <p:nvSpPr>
-          <p:cNvPr id="6" name="TextBox 5"/>
-          <p:cNvSpPr txBox="1"/>
+          <p:cNvPr id="7" name="Rounded Rectangle 6"/>
+          <p:cNvSpPr/>
           <p:nvPr/>
         </p:nvSpPr>
         <p:spPr>
           <a:xfrm>
-            <a:off x="9486900" y="2286000"/>
-            <a:ext cx="2476195" cy="3200400"/>
-          </a:xfrm>
-          <a:prstGeom prst="rect">
+            <a:off x="9624060" y="1645920"/>
+            <a:ext cx="2476195" cy="2926080"/>
+          </a:xfrm>
+          <a:prstGeom prst="roundRect">
             <a:avLst/>
           </a:prstGeom>
-          <a:noFill/>
-        </p:spPr>
-        <p:txBody>
-          <a:bodyPr wrap="square">
-            <a:spAutoFit/>
-          </a:bodyPr>
+          <a:solidFill>
+            <a:srgbClr val="1E293B"/>
+          </a:solidFill>
+          <a:ln w="12700">
+            <a:solidFill>
+              <a:srgbClr val="334155"/>
+            </a:solidFill>
+          </a:ln>
+        </p:spPr>
+        <p:style>
+          <a:lnRef idx="1">
+            <a:schemeClr val="accent1"/>
+          </a:lnRef>
+          <a:fillRef idx="3">
+            <a:schemeClr val="accent1"/>
+          </a:fillRef>
+          <a:effectRef idx="2">
+            <a:schemeClr val="accent1"/>
+          </a:effectRef>
+          <a:fontRef idx="minor">
+            <a:schemeClr val="lt1"/>
+          </a:fontRef>
+        </p:style>
+        <p:txBody>
+          <a:bodyPr rtlCol="0" anchor="ctr" wrap="square" lIns="137160" rIns="137160" tIns="274320"/>
           <a:lstStyle/>
           <a:p>
             <a:pPr algn="ctr">
-              <a:defRPr sz="3600" b="1">
+              <a:defRPr sz="4000" b="1">
                 <a:solidFill>
                   <a:srgbClr val="22D3EE"/>
                 </a:solidFill>
@@ -4304,7 +5204,10 @@
           </a:p>
           <a:p>
             <a:pPr algn="ctr">
-              <a:defRPr sz="1400">
+              <a:spcBef>
+                <a:spcPts val="600"/>
+              </a:spcBef>
+              <a:defRPr sz="1200">
                 <a:solidFill>
                   <a:srgbClr val="64748B"/>
                 </a:solidFill>
@@ -4352,7 +5255,7 @@
         <p:spPr>
           <a:xfrm>
             <a:off x="0" y="0"/>
-            <a:ext cx="12191695" cy="73152"/>
+            <a:ext cx="12191695" cy="54864"/>
           </a:xfrm>
           <a:prstGeom prst="rect">
             <a:avLst/>
@@ -4388,14 +5291,57 @@
       </p:sp>
       <p:sp>
         <p:nvSpPr>
-          <p:cNvPr id="3" name="TextBox 2"/>
+          <p:cNvPr id="3" name="Rectangle 2"/>
+          <p:cNvSpPr/>
+          <p:nvPr/>
+        </p:nvSpPr>
+        <p:spPr>
+          <a:xfrm>
+            <a:off x="0" y="0"/>
+            <a:ext cx="73152" cy="6858000"/>
+          </a:xfrm>
+          <a:prstGeom prst="rect">
+            <a:avLst/>
+          </a:prstGeom>
+          <a:solidFill>
+            <a:srgbClr val="6366F1"/>
+          </a:solidFill>
+          <a:ln>
+            <a:noFill/>
+          </a:ln>
+        </p:spPr>
+        <p:style>
+          <a:lnRef idx="1">
+            <a:schemeClr val="accent1"/>
+          </a:lnRef>
+          <a:fillRef idx="3">
+            <a:schemeClr val="accent1"/>
+          </a:fillRef>
+          <a:effectRef idx="2">
+            <a:schemeClr val="accent1"/>
+          </a:effectRef>
+          <a:fontRef idx="minor">
+            <a:schemeClr val="lt1"/>
+          </a:fontRef>
+        </p:style>
+        <p:txBody>
+          <a:bodyPr rtlCol="0" anchor="ctr"/>
+          <a:lstStyle/>
+          <a:p>
+            <a:pPr algn="ctr"/>
+          </a:p>
+        </p:txBody>
+      </p:sp>
+      <p:sp>
+        <p:nvSpPr>
+          <p:cNvPr id="4" name="TextBox 3"/>
           <p:cNvSpPr txBox="1"/>
           <p:nvPr/>
         </p:nvSpPr>
         <p:spPr>
           <a:xfrm>
-            <a:off x="685800" y="365760"/>
-            <a:ext cx="10820095" cy="731520"/>
+            <a:off x="822960" y="457200"/>
+            <a:ext cx="10545775" cy="640080"/>
           </a:xfrm>
           <a:prstGeom prst="rect">
             <a:avLst/>
@@ -4424,14 +5370,57 @@
       </p:sp>
       <p:sp>
         <p:nvSpPr>
-          <p:cNvPr id="4" name="TextBox 3"/>
+          <p:cNvPr id="5" name="Rectangle 4"/>
+          <p:cNvSpPr/>
+          <p:nvPr/>
+        </p:nvSpPr>
+        <p:spPr>
+          <a:xfrm>
+            <a:off x="822960" y="1143000"/>
+            <a:ext cx="1828800" cy="36576"/>
+          </a:xfrm>
+          <a:prstGeom prst="rect">
+            <a:avLst/>
+          </a:prstGeom>
+          <a:solidFill>
+            <a:srgbClr val="22D3EE"/>
+          </a:solidFill>
+          <a:ln>
+            <a:noFill/>
+          </a:ln>
+        </p:spPr>
+        <p:style>
+          <a:lnRef idx="1">
+            <a:schemeClr val="accent1"/>
+          </a:lnRef>
+          <a:fillRef idx="3">
+            <a:schemeClr val="accent1"/>
+          </a:fillRef>
+          <a:effectRef idx="2">
+            <a:schemeClr val="accent1"/>
+          </a:effectRef>
+          <a:fontRef idx="minor">
+            <a:schemeClr val="lt1"/>
+          </a:fontRef>
+        </p:style>
+        <p:txBody>
+          <a:bodyPr rtlCol="0" anchor="ctr"/>
+          <a:lstStyle/>
+          <a:p>
+            <a:pPr algn="ctr"/>
+          </a:p>
+        </p:txBody>
+      </p:sp>
+      <p:sp>
+        <p:nvSpPr>
+          <p:cNvPr id="6" name="TextBox 5"/>
           <p:cNvSpPr txBox="1"/>
           <p:nvPr/>
         </p:nvSpPr>
         <p:spPr>
           <a:xfrm>
-            <a:off x="685800" y="1371600"/>
-            <a:ext cx="10820095" cy="4572000"/>
+            <a:off x="822960" y="1463040"/>
+            <a:ext cx="6400800" cy="4572000"/>
           </a:xfrm>
           <a:prstGeom prst="rect">
             <a:avLst/>
@@ -4444,7 +5433,13 @@
           </a:bodyPr>
           <a:lstStyle/>
           <a:p>
-            <a:pPr algn="l">
+            <a:pPr lvl="1" algn="l">
+              <a:spcBef>
+                <a:spcPts val="400"/>
+              </a:spcBef>
+              <a:spcAft>
+                <a:spcPts val="800"/>
+              </a:spcAft>
               <a:defRPr sz="1600" b="0">
                 <a:solidFill>
                   <a:srgbClr val="F8FAFC"/>
@@ -4453,15 +5448,99 @@
               </a:defRPr>
             </a:pPr>
             <a:r>
-              <a:t>• Total addressable market: $47B and growing at 23% CAGR</a:t>
-            </a:r>
-            <a:br/>
-            <a:r>
-              <a:t>• Only 12% of enterprises have adopted modern solutions</a:t>
-            </a:r>
-            <a:br/>
-            <a:r>
-              <a:t>• Regulatory tailwinds are accelerating adoption globally</a:t>
+              <a:t>Total addressable market: $47B and growing at 23% CAGR</a:t>
+            </a:r>
+          </a:p>
+          <a:p>
+            <a:pPr lvl="1" algn="l">
+              <a:spcBef>
+                <a:spcPts val="400"/>
+              </a:spcBef>
+              <a:spcAft>
+                <a:spcPts val="800"/>
+              </a:spcAft>
+              <a:defRPr sz="1600" b="0">
+                <a:solidFill>
+                  <a:srgbClr val="F8FAFC"/>
+                </a:solidFill>
+                <a:latin typeface="Inter"/>
+              </a:defRPr>
+            </a:pPr>
+            <a:r>
+              <a:t>Only 12% of enterprises have adopted modern solutions</a:t>
+            </a:r>
+          </a:p>
+          <a:p>
+            <a:pPr lvl="1" algn="l">
+              <a:spcBef>
+                <a:spcPts val="400"/>
+              </a:spcBef>
+              <a:spcAft>
+                <a:spcPts val="800"/>
+              </a:spcAft>
+              <a:defRPr sz="1600" b="0">
+                <a:solidFill>
+                  <a:srgbClr val="F8FAFC"/>
+                </a:solidFill>
+                <a:latin typeface="Inter"/>
+              </a:defRPr>
+            </a:pPr>
+            <a:r>
+              <a:t>Regulatory tailwinds are accelerating adoption globally</a:t>
+            </a:r>
+          </a:p>
+        </p:txBody>
+      </p:sp>
+      <p:sp>
+        <p:nvSpPr>
+          <p:cNvPr id="7" name="Rounded Rectangle 6"/>
+          <p:cNvSpPr/>
+          <p:nvPr/>
+        </p:nvSpPr>
+        <p:spPr>
+          <a:xfrm>
+            <a:off x="7772400" y="1463040"/>
+            <a:ext cx="3657600" cy="4572000"/>
+          </a:xfrm>
+          <a:prstGeom prst="roundRect">
+            <a:avLst/>
+          </a:prstGeom>
+          <a:solidFill>
+            <a:srgbClr val="1E293B"/>
+          </a:solidFill>
+          <a:ln w="12700">
+            <a:solidFill>
+              <a:srgbClr val="334155"/>
+            </a:solidFill>
+          </a:ln>
+        </p:spPr>
+        <p:style>
+          <a:lnRef idx="1">
+            <a:schemeClr val="accent1"/>
+          </a:lnRef>
+          <a:fillRef idx="3">
+            <a:schemeClr val="accent1"/>
+          </a:fillRef>
+          <a:effectRef idx="2">
+            <a:schemeClr val="accent1"/>
+          </a:effectRef>
+          <a:fontRef idx="minor">
+            <a:schemeClr val="lt1"/>
+          </a:fontRef>
+        </p:style>
+        <p:txBody>
+          <a:bodyPr rtlCol="0" anchor="ctr" wrap="square"/>
+          <a:lstStyle/>
+          <a:p>
+            <a:pPr algn="ctr">
+              <a:defRPr sz="1200">
+                <a:solidFill>
+                  <a:srgbClr val="64748B"/>
+                </a:solidFill>
+              </a:defRPr>
+            </a:pPr>
+            <a:r>
+              <a:t>market globe world opportunity</a:t>
             </a:r>
           </a:p>
         </p:txBody>
@@ -4495,14 +5574,57 @@
       <p:grpSpPr/>
       <p:sp>
         <p:nvSpPr>
-          <p:cNvPr id="2" name="TextBox 1"/>
+          <p:cNvPr id="2" name="Rectangle 1"/>
+          <p:cNvSpPr/>
+          <p:nvPr/>
+        </p:nvSpPr>
+        <p:spPr>
+          <a:xfrm>
+            <a:off x="0" y="0"/>
+            <a:ext cx="73152" cy="6858000"/>
+          </a:xfrm>
+          <a:prstGeom prst="rect">
+            <a:avLst/>
+          </a:prstGeom>
+          <a:solidFill>
+            <a:srgbClr val="6366F1"/>
+          </a:solidFill>
+          <a:ln>
+            <a:noFill/>
+          </a:ln>
+        </p:spPr>
+        <p:style>
+          <a:lnRef idx="1">
+            <a:schemeClr val="accent1"/>
+          </a:lnRef>
+          <a:fillRef idx="3">
+            <a:schemeClr val="accent1"/>
+          </a:fillRef>
+          <a:effectRef idx="2">
+            <a:schemeClr val="accent1"/>
+          </a:effectRef>
+          <a:fontRef idx="minor">
+            <a:schemeClr val="lt1"/>
+          </a:fontRef>
+        </p:style>
+        <p:txBody>
+          <a:bodyPr rtlCol="0" anchor="ctr"/>
+          <a:lstStyle/>
+          <a:p>
+            <a:pPr algn="ctr"/>
+          </a:p>
+        </p:txBody>
+      </p:sp>
+      <p:sp>
+        <p:nvSpPr>
+          <p:cNvPr id="3" name="TextBox 2"/>
           <p:cNvSpPr txBox="1"/>
           <p:nvPr/>
         </p:nvSpPr>
         <p:spPr>
           <a:xfrm>
-            <a:off x="685800" y="365760"/>
-            <a:ext cx="10820095" cy="731520"/>
+            <a:off x="822960" y="457200"/>
+            <a:ext cx="10545775" cy="640080"/>
           </a:xfrm>
           <a:prstGeom prst="rect">
             <a:avLst/>
@@ -4531,14 +5653,57 @@
       </p:sp>
       <p:sp>
         <p:nvSpPr>
-          <p:cNvPr id="3" name="TextBox 2"/>
+          <p:cNvPr id="4" name="Rectangle 3"/>
+          <p:cNvSpPr/>
+          <p:nvPr/>
+        </p:nvSpPr>
+        <p:spPr>
+          <a:xfrm>
+            <a:off x="822960" y="1143000"/>
+            <a:ext cx="1828800" cy="36576"/>
+          </a:xfrm>
+          <a:prstGeom prst="rect">
+            <a:avLst/>
+          </a:prstGeom>
+          <a:solidFill>
+            <a:srgbClr val="22D3EE"/>
+          </a:solidFill>
+          <a:ln>
+            <a:noFill/>
+          </a:ln>
+        </p:spPr>
+        <p:style>
+          <a:lnRef idx="1">
+            <a:schemeClr val="accent1"/>
+          </a:lnRef>
+          <a:fillRef idx="3">
+            <a:schemeClr val="accent1"/>
+          </a:fillRef>
+          <a:effectRef idx="2">
+            <a:schemeClr val="accent1"/>
+          </a:effectRef>
+          <a:fontRef idx="minor">
+            <a:schemeClr val="lt1"/>
+          </a:fontRef>
+        </p:style>
+        <p:txBody>
+          <a:bodyPr rtlCol="0" anchor="ctr"/>
+          <a:lstStyle/>
+          <a:p>
+            <a:pPr algn="ctr"/>
+          </a:p>
+        </p:txBody>
+      </p:sp>
+      <p:sp>
+        <p:nvSpPr>
+          <p:cNvPr id="5" name="TextBox 4"/>
           <p:cNvSpPr txBox="1"/>
           <p:nvPr/>
         </p:nvSpPr>
         <p:spPr>
           <a:xfrm>
-            <a:off x="685800" y="1371600"/>
-            <a:ext cx="10820095" cy="4572000"/>
+            <a:off x="822960" y="1463040"/>
+            <a:ext cx="6400800" cy="4572000"/>
           </a:xfrm>
           <a:prstGeom prst="rect">
             <a:avLst/>
@@ -4551,7 +5716,13 @@
           </a:bodyPr>
           <a:lstStyle/>
           <a:p>
-            <a:pPr algn="l">
+            <a:pPr lvl="1" algn="l">
+              <a:spcBef>
+                <a:spcPts val="400"/>
+              </a:spcBef>
+              <a:spcAft>
+                <a:spcPts val="800"/>
+              </a:spcAft>
               <a:defRPr sz="1600" b="0">
                 <a:solidFill>
                   <a:srgbClr val="F8FAFC"/>
@@ -4560,15 +5731,99 @@
               </a:defRPr>
             </a:pPr>
             <a:r>
-              <a:t>• SaaS subscription with 85%+ gross margins</a:t>
-            </a:r>
-            <a:br/>
-            <a:r>
-              <a:t>• Land-and-expand: free tier → team → enterprise</a:t>
-            </a:r>
-            <a:br/>
-            <a:r>
-              <a:t>• Net revenue retention: 120%+ (expansion exceeds churn)</a:t>
+              <a:t>SaaS subscription with 85%+ gross margins</a:t>
+            </a:r>
+          </a:p>
+          <a:p>
+            <a:pPr lvl="1" algn="l">
+              <a:spcBef>
+                <a:spcPts val="400"/>
+              </a:spcBef>
+              <a:spcAft>
+                <a:spcPts val="800"/>
+              </a:spcAft>
+              <a:defRPr sz="1600" b="0">
+                <a:solidFill>
+                  <a:srgbClr val="F8FAFC"/>
+                </a:solidFill>
+                <a:latin typeface="Inter"/>
+              </a:defRPr>
+            </a:pPr>
+            <a:r>
+              <a:t>Land-and-expand: free tier → team → enterprise</a:t>
+            </a:r>
+          </a:p>
+          <a:p>
+            <a:pPr lvl="1" algn="l">
+              <a:spcBef>
+                <a:spcPts val="400"/>
+              </a:spcBef>
+              <a:spcAft>
+                <a:spcPts val="800"/>
+              </a:spcAft>
+              <a:defRPr sz="1600" b="0">
+                <a:solidFill>
+                  <a:srgbClr val="F8FAFC"/>
+                </a:solidFill>
+                <a:latin typeface="Inter"/>
+              </a:defRPr>
+            </a:pPr>
+            <a:r>
+              <a:t>Net revenue retention: 120%+ (expansion exceeds churn)</a:t>
+            </a:r>
+          </a:p>
+        </p:txBody>
+      </p:sp>
+      <p:sp>
+        <p:nvSpPr>
+          <p:cNvPr id="6" name="Rounded Rectangle 5"/>
+          <p:cNvSpPr/>
+          <p:nvPr/>
+        </p:nvSpPr>
+        <p:spPr>
+          <a:xfrm>
+            <a:off x="7772400" y="1463040"/>
+            <a:ext cx="3657600" cy="4572000"/>
+          </a:xfrm>
+          <a:prstGeom prst="roundRect">
+            <a:avLst/>
+          </a:prstGeom>
+          <a:solidFill>
+            <a:srgbClr val="1E293B"/>
+          </a:solidFill>
+          <a:ln w="12700">
+            <a:solidFill>
+              <a:srgbClr val="334155"/>
+            </a:solidFill>
+          </a:ln>
+        </p:spPr>
+        <p:style>
+          <a:lnRef idx="1">
+            <a:schemeClr val="accent1"/>
+          </a:lnRef>
+          <a:fillRef idx="3">
+            <a:schemeClr val="accent1"/>
+          </a:fillRef>
+          <a:effectRef idx="2">
+            <a:schemeClr val="accent1"/>
+          </a:effectRef>
+          <a:fontRef idx="minor">
+            <a:schemeClr val="lt1"/>
+          </a:fontRef>
+        </p:style>
+        <p:txBody>
+          <a:bodyPr rtlCol="0" anchor="ctr" wrap="square"/>
+          <a:lstStyle/>
+          <a:p>
+            <a:pPr algn="ctr">
+              <a:defRPr sz="1200">
+                <a:solidFill>
+                  <a:srgbClr val="64748B"/>
+                </a:solidFill>
+              </a:defRPr>
+            </a:pPr>
+            <a:r>
+              <a:t>business strategy chart professional</a:t>
             </a:r>
           </a:p>
         </p:txBody>
@@ -4602,14 +5857,57 @@
       <p:grpSpPr/>
       <p:sp>
         <p:nvSpPr>
-          <p:cNvPr id="2" name="TextBox 1"/>
+          <p:cNvPr id="2" name="Rectangle 1"/>
+          <p:cNvSpPr/>
+          <p:nvPr/>
+        </p:nvSpPr>
+        <p:spPr>
+          <a:xfrm>
+            <a:off x="0" y="0"/>
+            <a:ext cx="73152" cy="6858000"/>
+          </a:xfrm>
+          <a:prstGeom prst="rect">
+            <a:avLst/>
+          </a:prstGeom>
+          <a:solidFill>
+            <a:srgbClr val="6366F1"/>
+          </a:solidFill>
+          <a:ln>
+            <a:noFill/>
+          </a:ln>
+        </p:spPr>
+        <p:style>
+          <a:lnRef idx="1">
+            <a:schemeClr val="accent1"/>
+          </a:lnRef>
+          <a:fillRef idx="3">
+            <a:schemeClr val="accent1"/>
+          </a:fillRef>
+          <a:effectRef idx="2">
+            <a:schemeClr val="accent1"/>
+          </a:effectRef>
+          <a:fontRef idx="minor">
+            <a:schemeClr val="lt1"/>
+          </a:fontRef>
+        </p:style>
+        <p:txBody>
+          <a:bodyPr rtlCol="0" anchor="ctr"/>
+          <a:lstStyle/>
+          <a:p>
+            <a:pPr algn="ctr"/>
+          </a:p>
+        </p:txBody>
+      </p:sp>
+      <p:sp>
+        <p:nvSpPr>
+          <p:cNvPr id="3" name="TextBox 2"/>
           <p:cNvSpPr txBox="1"/>
           <p:nvPr/>
         </p:nvSpPr>
         <p:spPr>
           <a:xfrm>
-            <a:off x="685800" y="365760"/>
-            <a:ext cx="10820095" cy="731520"/>
+            <a:off x="822960" y="457200"/>
+            <a:ext cx="10545775" cy="640080"/>
           </a:xfrm>
           <a:prstGeom prst="rect">
             <a:avLst/>
@@ -4638,14 +5936,57 @@
       </p:sp>
       <p:sp>
         <p:nvSpPr>
-          <p:cNvPr id="3" name="TextBox 2"/>
+          <p:cNvPr id="4" name="Rectangle 3"/>
+          <p:cNvSpPr/>
+          <p:nvPr/>
+        </p:nvSpPr>
+        <p:spPr>
+          <a:xfrm>
+            <a:off x="822960" y="1143000"/>
+            <a:ext cx="1828800" cy="36576"/>
+          </a:xfrm>
+          <a:prstGeom prst="rect">
+            <a:avLst/>
+          </a:prstGeom>
+          <a:solidFill>
+            <a:srgbClr val="22D3EE"/>
+          </a:solidFill>
+          <a:ln>
+            <a:noFill/>
+          </a:ln>
+        </p:spPr>
+        <p:style>
+          <a:lnRef idx="1">
+            <a:schemeClr val="accent1"/>
+          </a:lnRef>
+          <a:fillRef idx="3">
+            <a:schemeClr val="accent1"/>
+          </a:fillRef>
+          <a:effectRef idx="2">
+            <a:schemeClr val="accent1"/>
+          </a:effectRef>
+          <a:fontRef idx="minor">
+            <a:schemeClr val="lt1"/>
+          </a:fontRef>
+        </p:style>
+        <p:txBody>
+          <a:bodyPr rtlCol="0" anchor="ctr"/>
+          <a:lstStyle/>
+          <a:p>
+            <a:pPr algn="ctr"/>
+          </a:p>
+        </p:txBody>
+      </p:sp>
+      <p:sp>
+        <p:nvSpPr>
+          <p:cNvPr id="5" name="TextBox 4"/>
           <p:cNvSpPr txBox="1"/>
           <p:nvPr/>
         </p:nvSpPr>
         <p:spPr>
           <a:xfrm>
-            <a:off x="685800" y="1371600"/>
-            <a:ext cx="10820095" cy="4572000"/>
+            <a:off x="822960" y="1463040"/>
+            <a:ext cx="6400800" cy="4572000"/>
           </a:xfrm>
           <a:prstGeom prst="rect">
             <a:avLst/>
@@ -4658,7 +5999,13 @@
           </a:bodyPr>
           <a:lstStyle/>
           <a:p>
-            <a:pPr algn="l">
+            <a:pPr lvl="1" algn="l">
+              <a:spcBef>
+                <a:spcPts val="400"/>
+              </a:spcBef>
+              <a:spcAft>
+                <a:spcPts val="800"/>
+              </a:spcAft>
               <a:defRPr sz="1600" b="0">
                 <a:solidFill>
                   <a:srgbClr val="F8FAFC"/>
@@ -4667,15 +6014,99 @@
               </a:defRPr>
             </a:pPr>
             <a:r>
-              <a:t>• CEO: 15yr industry experience, 2x founder (1 exit)</a:t>
-            </a:r>
-            <a:br/>
-            <a:r>
-              <a:t>• CTO: Former principal engineer at top tech company</a:t>
-            </a:r>
-            <a:br/>
-            <a:r>
-              <a:t>• VP Sales: Built $0→$50M ARR pipeline at previous startup</a:t>
+              <a:t>CEO: 15yr industry experience, 2x founder (1 exit)</a:t>
+            </a:r>
+          </a:p>
+          <a:p>
+            <a:pPr lvl="1" algn="l">
+              <a:spcBef>
+                <a:spcPts val="400"/>
+              </a:spcBef>
+              <a:spcAft>
+                <a:spcPts val="800"/>
+              </a:spcAft>
+              <a:defRPr sz="1600" b="0">
+                <a:solidFill>
+                  <a:srgbClr val="F8FAFC"/>
+                </a:solidFill>
+                <a:latin typeface="Inter"/>
+              </a:defRPr>
+            </a:pPr>
+            <a:r>
+              <a:t>CTO: Former principal engineer at top tech company</a:t>
+            </a:r>
+          </a:p>
+          <a:p>
+            <a:pPr lvl="1" algn="l">
+              <a:spcBef>
+                <a:spcPts val="400"/>
+              </a:spcBef>
+              <a:spcAft>
+                <a:spcPts val="800"/>
+              </a:spcAft>
+              <a:defRPr sz="1600" b="0">
+                <a:solidFill>
+                  <a:srgbClr val="F8FAFC"/>
+                </a:solidFill>
+                <a:latin typeface="Inter"/>
+              </a:defRPr>
+            </a:pPr>
+            <a:r>
+              <a:t>VP Sales: Built $0→$50M ARR pipeline at previous startup</a:t>
+            </a:r>
+          </a:p>
+        </p:txBody>
+      </p:sp>
+      <p:sp>
+        <p:nvSpPr>
+          <p:cNvPr id="6" name="Rounded Rectangle 5"/>
+          <p:cNvSpPr/>
+          <p:nvPr/>
+        </p:nvSpPr>
+        <p:spPr>
+          <a:xfrm>
+            <a:off x="7772400" y="1463040"/>
+            <a:ext cx="3657600" cy="4572000"/>
+          </a:xfrm>
+          <a:prstGeom prst="roundRect">
+            <a:avLst/>
+          </a:prstGeom>
+          <a:solidFill>
+            <a:srgbClr val="1E293B"/>
+          </a:solidFill>
+          <a:ln w="12700">
+            <a:solidFill>
+              <a:srgbClr val="334155"/>
+            </a:solidFill>
+          </a:ln>
+        </p:spPr>
+        <p:style>
+          <a:lnRef idx="1">
+            <a:schemeClr val="accent1"/>
+          </a:lnRef>
+          <a:fillRef idx="3">
+            <a:schemeClr val="accent1"/>
+          </a:fillRef>
+          <a:effectRef idx="2">
+            <a:schemeClr val="accent1"/>
+          </a:effectRef>
+          <a:fontRef idx="minor">
+            <a:schemeClr val="lt1"/>
+          </a:fontRef>
+        </p:style>
+        <p:txBody>
+          <a:bodyPr rtlCol="0" anchor="ctr" wrap="square"/>
+          <a:lstStyle/>
+          <a:p>
+            <a:pPr algn="ctr">
+              <a:defRPr sz="1200">
+                <a:solidFill>
+                  <a:srgbClr val="64748B"/>
+                </a:solidFill>
+              </a:defRPr>
+            </a:pPr>
+            <a:r>
+              <a:t>team collaboration people</a:t>
             </a:r>
           </a:p>
         </p:txBody>
@@ -4715,8 +6146,8 @@
         </p:nvSpPr>
         <p:spPr>
           <a:xfrm>
-            <a:off x="685800" y="365760"/>
-            <a:ext cx="10820095" cy="731520"/>
+            <a:off x="822960" y="457200"/>
+            <a:ext cx="10545775" cy="640080"/>
           </a:xfrm>
           <a:prstGeom prst="rect">
             <a:avLst/>
@@ -4745,14 +6176,75 @@
       </p:sp>
       <p:sp>
         <p:nvSpPr>
-          <p:cNvPr id="3" name="TextBox 2"/>
+          <p:cNvPr id="3" name="Rectangle 2"/>
+          <p:cNvSpPr/>
+          <p:nvPr/>
+        </p:nvSpPr>
+        <p:spPr>
+          <a:xfrm>
+            <a:off x="822960" y="1143000"/>
+            <a:ext cx="1828800" cy="36576"/>
+          </a:xfrm>
+          <a:prstGeom prst="rect">
+            <a:avLst/>
+          </a:prstGeom>
+          <a:solidFill>
+            <a:srgbClr val="22D3EE"/>
+          </a:solidFill>
+          <a:ln>
+            <a:noFill/>
+          </a:ln>
+        </p:spPr>
+        <p:style>
+          <a:lnRef idx="1">
+            <a:schemeClr val="accent1"/>
+          </a:lnRef>
+          <a:fillRef idx="3">
+            <a:schemeClr val="accent1"/>
+          </a:fillRef>
+          <a:effectRef idx="2">
+            <a:schemeClr val="accent1"/>
+          </a:effectRef>
+          <a:fontRef idx="minor">
+            <a:schemeClr val="lt1"/>
+          </a:fontRef>
+        </p:style>
+        <p:txBody>
+          <a:bodyPr rtlCol="0" anchor="ctr"/>
+          <a:lstStyle/>
+          <a:p>
+            <a:pPr algn="ctr"/>
+          </a:p>
+        </p:txBody>
+      </p:sp>
+      <p:graphicFrame>
+        <p:nvGraphicFramePr>
+          <p:cNvPr id="4" name="Chart 3"/>
+          <p:cNvGraphicFramePr>
+            <a:graphicFrameLocks noGrp="1"/>
+          </p:cNvGraphicFramePr>
+          <p:nvPr/>
+        </p:nvGraphicFramePr>
+        <p:xfrm>
+          <a:off x="1097280" y="1463040"/>
+          <a:ext cx="6858000" cy="4572000"/>
+        </p:xfrm>
+        <a:graphic>
+          <a:graphicData uri="http://schemas.openxmlformats.org/drawingml/2006/chart">
+            <c:chart xmlns:c="http://schemas.openxmlformats.org/drawingml/2006/chart" r:id="rId2"/>
+          </a:graphicData>
+        </a:graphic>
+      </p:graphicFrame>
+      <p:sp>
+        <p:nvSpPr>
+          <p:cNvPr id="5" name="TextBox 4"/>
           <p:cNvSpPr txBox="1"/>
           <p:nvPr/>
         </p:nvSpPr>
         <p:spPr>
           <a:xfrm>
-            <a:off x="685800" y="1371600"/>
-            <a:ext cx="10820095" cy="4572000"/>
+            <a:off x="8412480" y="1645920"/>
+            <a:ext cx="3200400" cy="4114800"/>
           </a:xfrm>
           <a:prstGeom prst="rect">
             <a:avLst/>
@@ -4766,7 +6258,7 @@
           <a:lstStyle/>
           <a:p>
             <a:pPr algn="l">
-              <a:defRPr sz="1600" b="0">
+              <a:defRPr sz="1400" b="0">
                 <a:solidFill>
                   <a:srgbClr val="F8FAFC"/>
                 </a:solidFill>

--- a/examples/01-ai-startup-investor-pitch.pptx
+++ b/examples/01-ai-startup-investor-pitch.pptx
@@ -3653,60 +3653,30 @@
           </a:p>
         </p:txBody>
       </p:sp>
-      <p:sp>
-        <p:nvSpPr>
-          <p:cNvPr id="5" name="Rounded Rectangle 4"/>
-          <p:cNvSpPr/>
+      <p:pic>
+        <p:nvPicPr>
+          <p:cNvPr id="5" name="Picture 4" descr="d06affc47b48ae94b587c226d56762b7.png"/>
+          <p:cNvPicPr>
+            <a:picLocks noChangeAspect="1"/>
+          </p:cNvPicPr>
           <p:nvPr/>
-        </p:nvSpPr>
+        </p:nvPicPr>
+        <p:blipFill>
+          <a:blip r:embed="rId2"/>
+          <a:stretch>
+            <a:fillRect/>
+          </a:stretch>
+        </p:blipFill>
         <p:spPr>
           <a:xfrm>
             <a:off x="5410504" y="365760"/>
             <a:ext cx="1371600" cy="457200"/>
           </a:xfrm>
-          <a:prstGeom prst="roundRect">
+          <a:prstGeom prst="rect">
             <a:avLst/>
           </a:prstGeom>
-          <a:solidFill>
-            <a:srgbClr val="1E293B"/>
-          </a:solidFill>
-          <a:ln w="12700">
-            <a:solidFill>
-              <a:srgbClr val="334155"/>
-            </a:solidFill>
-          </a:ln>
-        </p:spPr>
-        <p:style>
-          <a:lnRef idx="1">
-            <a:schemeClr val="accent1"/>
-          </a:lnRef>
-          <a:fillRef idx="3">
-            <a:schemeClr val="accent1"/>
-          </a:fillRef>
-          <a:effectRef idx="2">
-            <a:schemeClr val="accent1"/>
-          </a:effectRef>
-          <a:fontRef idx="minor">
-            <a:schemeClr val="lt1"/>
-          </a:fontRef>
-        </p:style>
-        <p:txBody>
-          <a:bodyPr rtlCol="0" anchor="ctr" wrap="square"/>
-          <a:lstStyle/>
-          <a:p>
-            <a:pPr algn="ctr">
-              <a:defRPr sz="1200">
-                <a:solidFill>
-                  <a:srgbClr val="64748B"/>
-                </a:solidFill>
-              </a:defRPr>
-            </a:pPr>
-            <a:r>
-              <a:t>abstract technology innovation</a:t>
-            </a:r>
-          </a:p>
-        </p:txBody>
-      </p:sp>
+        </p:spPr>
+      </p:pic>
     </p:spTree>
   </p:cSld>
   <p:clrMapOvr>
@@ -4137,60 +4107,30 @@
           </a:p>
         </p:txBody>
       </p:sp>
-      <p:sp>
-        <p:nvSpPr>
-          <p:cNvPr id="6" name="Rounded Rectangle 5"/>
-          <p:cNvSpPr/>
+      <p:pic>
+        <p:nvPicPr>
+          <p:cNvPr id="6" name="Picture 5" descr="e3568e1f21f43d0e79e748becdd72c4c.png"/>
+          <p:cNvPicPr>
+            <a:picLocks noChangeAspect="1"/>
+          </p:cNvPicPr>
           <p:nvPr/>
-        </p:nvSpPr>
+        </p:nvPicPr>
+        <p:blipFill>
+          <a:blip r:embed="rId2"/>
+          <a:stretch>
+            <a:fillRect/>
+          </a:stretch>
+        </p:blipFill>
         <p:spPr>
           <a:xfrm>
             <a:off x="7772400" y="1463040"/>
             <a:ext cx="3657600" cy="4572000"/>
           </a:xfrm>
-          <a:prstGeom prst="roundRect">
+          <a:prstGeom prst="rect">
             <a:avLst/>
           </a:prstGeom>
-          <a:solidFill>
-            <a:srgbClr val="1E293B"/>
-          </a:solidFill>
-          <a:ln w="12700">
-            <a:solidFill>
-              <a:srgbClr val="334155"/>
-            </a:solidFill>
-          </a:ln>
-        </p:spPr>
-        <p:style>
-          <a:lnRef idx="1">
-            <a:schemeClr val="accent1"/>
-          </a:lnRef>
-          <a:fillRef idx="3">
-            <a:schemeClr val="accent1"/>
-          </a:fillRef>
-          <a:effectRef idx="2">
-            <a:schemeClr val="accent1"/>
-          </a:effectRef>
-          <a:fontRef idx="minor">
-            <a:schemeClr val="lt1"/>
-          </a:fontRef>
-        </p:style>
-        <p:txBody>
-          <a:bodyPr rtlCol="0" anchor="ctr" wrap="square"/>
-          <a:lstStyle/>
-          <a:p>
-            <a:pPr algn="ctr">
-              <a:defRPr sz="1200">
-                <a:solidFill>
-                  <a:srgbClr val="64748B"/>
-                </a:solidFill>
-              </a:defRPr>
-            </a:pPr>
-            <a:r>
-              <a:t>frustration stress problem dark</a:t>
-            </a:r>
-          </a:p>
-        </p:txBody>
-      </p:sp>
+        </p:spPr>
+      </p:pic>
     </p:spTree>
   </p:cSld>
   <p:clrMapOvr>
@@ -4667,60 +4607,30 @@
         <p:nvPr/>
       </p:nvGrpSpPr>
       <p:grpSpPr/>
-      <p:sp>
-        <p:nvSpPr>
-          <p:cNvPr id="2" name="Rounded Rectangle 1"/>
-          <p:cNvSpPr/>
+      <p:pic>
+        <p:nvPicPr>
+          <p:cNvPr id="2" name="Picture 1" descr="765faa7128aa84dd1743b69e3e54eb53.png"/>
+          <p:cNvPicPr>
+            <a:picLocks noChangeAspect="1"/>
+          </p:cNvPicPr>
           <p:nvPr/>
-        </p:nvSpPr>
+        </p:nvPicPr>
+        <p:blipFill>
+          <a:blip r:embed="rId2"/>
+          <a:stretch>
+            <a:fillRect/>
+          </a:stretch>
+        </p:blipFill>
         <p:spPr>
           <a:xfrm>
             <a:off x="0" y="0"/>
             <a:ext cx="6858000" cy="6858000"/>
           </a:xfrm>
-          <a:prstGeom prst="roundRect">
+          <a:prstGeom prst="rect">
             <a:avLst/>
           </a:prstGeom>
-          <a:solidFill>
-            <a:srgbClr val="1E293B"/>
-          </a:solidFill>
-          <a:ln w="12700">
-            <a:solidFill>
-              <a:srgbClr val="334155"/>
-            </a:solidFill>
-          </a:ln>
-        </p:spPr>
-        <p:style>
-          <a:lnRef idx="1">
-            <a:schemeClr val="accent1"/>
-          </a:lnRef>
-          <a:fillRef idx="3">
-            <a:schemeClr val="accent1"/>
-          </a:fillRef>
-          <a:effectRef idx="2">
-            <a:schemeClr val="accent1"/>
-          </a:effectRef>
-          <a:fontRef idx="minor">
-            <a:schemeClr val="lt1"/>
-          </a:fontRef>
-        </p:style>
-        <p:txBody>
-          <a:bodyPr rtlCol="0" anchor="ctr" wrap="square"/>
-          <a:lstStyle/>
-          <a:p>
-            <a:pPr algn="ctr">
-              <a:defRPr sz="1200">
-                <a:solidFill>
-                  <a:srgbClr val="64748B"/>
-                </a:solidFill>
-              </a:defRPr>
-            </a:pPr>
-            <a:r>
-              <a:t>product interface app modern</a:t>
-            </a:r>
-          </a:p>
-        </p:txBody>
-      </p:sp>
+        </p:spPr>
+      </p:pic>
       <p:sp>
         <p:nvSpPr>
           <p:cNvPr id="3" name="TextBox 2"/>
@@ -5491,60 +5401,30 @@
           </a:p>
         </p:txBody>
       </p:sp>
-      <p:sp>
-        <p:nvSpPr>
-          <p:cNvPr id="7" name="Rounded Rectangle 6"/>
-          <p:cNvSpPr/>
+      <p:pic>
+        <p:nvPicPr>
+          <p:cNvPr id="7" name="Picture 6" descr="e3568e1f21f43d0e79e748becdd72c4c.png"/>
+          <p:cNvPicPr>
+            <a:picLocks noChangeAspect="1"/>
+          </p:cNvPicPr>
           <p:nvPr/>
-        </p:nvSpPr>
+        </p:nvPicPr>
+        <p:blipFill>
+          <a:blip r:embed="rId2"/>
+          <a:stretch>
+            <a:fillRect/>
+          </a:stretch>
+        </p:blipFill>
         <p:spPr>
           <a:xfrm>
             <a:off x="7772400" y="1463040"/>
             <a:ext cx="3657600" cy="4572000"/>
           </a:xfrm>
-          <a:prstGeom prst="roundRect">
+          <a:prstGeom prst="rect">
             <a:avLst/>
           </a:prstGeom>
-          <a:solidFill>
-            <a:srgbClr val="1E293B"/>
-          </a:solidFill>
-          <a:ln w="12700">
-            <a:solidFill>
-              <a:srgbClr val="334155"/>
-            </a:solidFill>
-          </a:ln>
-        </p:spPr>
-        <p:style>
-          <a:lnRef idx="1">
-            <a:schemeClr val="accent1"/>
-          </a:lnRef>
-          <a:fillRef idx="3">
-            <a:schemeClr val="accent1"/>
-          </a:fillRef>
-          <a:effectRef idx="2">
-            <a:schemeClr val="accent1"/>
-          </a:effectRef>
-          <a:fontRef idx="minor">
-            <a:schemeClr val="lt1"/>
-          </a:fontRef>
-        </p:style>
-        <p:txBody>
-          <a:bodyPr rtlCol="0" anchor="ctr" wrap="square"/>
-          <a:lstStyle/>
-          <a:p>
-            <a:pPr algn="ctr">
-              <a:defRPr sz="1200">
-                <a:solidFill>
-                  <a:srgbClr val="64748B"/>
-                </a:solidFill>
-              </a:defRPr>
-            </a:pPr>
-            <a:r>
-              <a:t>market globe world opportunity</a:t>
-            </a:r>
-          </a:p>
-        </p:txBody>
-      </p:sp>
+        </p:spPr>
+      </p:pic>
     </p:spTree>
   </p:cSld>
   <p:clrMapOvr>
@@ -5774,60 +5654,30 @@
           </a:p>
         </p:txBody>
       </p:sp>
-      <p:sp>
-        <p:nvSpPr>
-          <p:cNvPr id="6" name="Rounded Rectangle 5"/>
-          <p:cNvSpPr/>
+      <p:pic>
+        <p:nvPicPr>
+          <p:cNvPr id="6" name="Picture 5" descr="e3568e1f21f43d0e79e748becdd72c4c.png"/>
+          <p:cNvPicPr>
+            <a:picLocks noChangeAspect="1"/>
+          </p:cNvPicPr>
           <p:nvPr/>
-        </p:nvSpPr>
+        </p:nvPicPr>
+        <p:blipFill>
+          <a:blip r:embed="rId2"/>
+          <a:stretch>
+            <a:fillRect/>
+          </a:stretch>
+        </p:blipFill>
         <p:spPr>
           <a:xfrm>
             <a:off x="7772400" y="1463040"/>
             <a:ext cx="3657600" cy="4572000"/>
           </a:xfrm>
-          <a:prstGeom prst="roundRect">
+          <a:prstGeom prst="rect">
             <a:avLst/>
           </a:prstGeom>
-          <a:solidFill>
-            <a:srgbClr val="1E293B"/>
-          </a:solidFill>
-          <a:ln w="12700">
-            <a:solidFill>
-              <a:srgbClr val="334155"/>
-            </a:solidFill>
-          </a:ln>
-        </p:spPr>
-        <p:style>
-          <a:lnRef idx="1">
-            <a:schemeClr val="accent1"/>
-          </a:lnRef>
-          <a:fillRef idx="3">
-            <a:schemeClr val="accent1"/>
-          </a:fillRef>
-          <a:effectRef idx="2">
-            <a:schemeClr val="accent1"/>
-          </a:effectRef>
-          <a:fontRef idx="minor">
-            <a:schemeClr val="lt1"/>
-          </a:fontRef>
-        </p:style>
-        <p:txBody>
-          <a:bodyPr rtlCol="0" anchor="ctr" wrap="square"/>
-          <a:lstStyle/>
-          <a:p>
-            <a:pPr algn="ctr">
-              <a:defRPr sz="1200">
-                <a:solidFill>
-                  <a:srgbClr val="64748B"/>
-                </a:solidFill>
-              </a:defRPr>
-            </a:pPr>
-            <a:r>
-              <a:t>business strategy chart professional</a:t>
-            </a:r>
-          </a:p>
-        </p:txBody>
-      </p:sp>
+        </p:spPr>
+      </p:pic>
     </p:spTree>
   </p:cSld>
   <p:clrMapOvr>
@@ -6057,60 +5907,30 @@
           </a:p>
         </p:txBody>
       </p:sp>
-      <p:sp>
-        <p:nvSpPr>
-          <p:cNvPr id="6" name="Rounded Rectangle 5"/>
-          <p:cNvSpPr/>
+      <p:pic>
+        <p:nvPicPr>
+          <p:cNvPr id="6" name="Picture 5" descr="e3568e1f21f43d0e79e748becdd72c4c.png"/>
+          <p:cNvPicPr>
+            <a:picLocks noChangeAspect="1"/>
+          </p:cNvPicPr>
           <p:nvPr/>
-        </p:nvSpPr>
+        </p:nvPicPr>
+        <p:blipFill>
+          <a:blip r:embed="rId2"/>
+          <a:stretch>
+            <a:fillRect/>
+          </a:stretch>
+        </p:blipFill>
         <p:spPr>
           <a:xfrm>
             <a:off x="7772400" y="1463040"/>
             <a:ext cx="3657600" cy="4572000"/>
           </a:xfrm>
-          <a:prstGeom prst="roundRect">
+          <a:prstGeom prst="rect">
             <a:avLst/>
           </a:prstGeom>
-          <a:solidFill>
-            <a:srgbClr val="1E293B"/>
-          </a:solidFill>
-          <a:ln w="12700">
-            <a:solidFill>
-              <a:srgbClr val="334155"/>
-            </a:solidFill>
-          </a:ln>
-        </p:spPr>
-        <p:style>
-          <a:lnRef idx="1">
-            <a:schemeClr val="accent1"/>
-          </a:lnRef>
-          <a:fillRef idx="3">
-            <a:schemeClr val="accent1"/>
-          </a:fillRef>
-          <a:effectRef idx="2">
-            <a:schemeClr val="accent1"/>
-          </a:effectRef>
-          <a:fontRef idx="minor">
-            <a:schemeClr val="lt1"/>
-          </a:fontRef>
-        </p:style>
-        <p:txBody>
-          <a:bodyPr rtlCol="0" anchor="ctr" wrap="square"/>
-          <a:lstStyle/>
-          <a:p>
-            <a:pPr algn="ctr">
-              <a:defRPr sz="1200">
-                <a:solidFill>
-                  <a:srgbClr val="64748B"/>
-                </a:solidFill>
-              </a:defRPr>
-            </a:pPr>
-            <a:r>
-              <a:t>team collaboration people</a:t>
-            </a:r>
-          </a:p>
-        </p:txBody>
-      </p:sp>
+        </p:spPr>
+      </p:pic>
     </p:spTree>
   </p:cSld>
   <p:clrMapOvr>
